--- a/python_course/chapter_04_loops/loops.pptx
+++ b/python_course/chapter_04_loops/loops.pptx
@@ -18,8 +18,6 @@
     <p:sldId id="266" r:id="rId17"/>
     <p:sldId id="267" r:id="rId18"/>
     <p:sldId id="268" r:id="rId19"/>
-    <p:sldId id="269" r:id="rId20"/>
-    <p:sldId id="270" r:id="rId21"/>
   </p:sldIdLst>
   <p:sldSz cx="12191695" cy="6858000" type="screen4x3"/>
   <p:notesSz cx="6858000" cy="9144000"/>
@@ -3153,8 +3151,8 @@
         </p:nvSpPr>
         <p:spPr>
           <a:xfrm>
-            <a:off x="914400" y="1828800"/>
-            <a:ext cx="10360152" cy="1371600"/>
+            <a:off x="914400" y="2286000"/>
+            <a:ext cx="10360152" cy="1097280"/>
           </a:xfrm>
           <a:prstGeom prst="rect">
             <a:avLst/>
@@ -3168,14 +3166,14 @@
           <a:lstStyle/>
           <a:p>
             <a:pPr algn="ctr">
-              <a:defRPr sz="5400" b="1">
+              <a:defRPr sz="4800" b="1">
                 <a:solidFill>
                   <a:srgbClr val="003366"/>
                 </a:solidFill>
               </a:defRPr>
             </a:pPr>
             <a:r>
-              <a:t>Chapter 4</a:t>
+              <a:t>Chapter 4: Loops</a:t>
             </a:r>
           </a:p>
         </p:txBody>
@@ -3189,7 +3187,7 @@
         <p:spPr>
           <a:xfrm>
             <a:off x="914400" y="3657600"/>
-            <a:ext cx="10360152" cy="548640"/>
+            <a:ext cx="10360152" cy="731520"/>
           </a:xfrm>
           <a:prstGeom prst="rect">
             <a:avLst/>
@@ -3210,42 +3208,7 @@
               </a:defRPr>
             </a:pPr>
             <a:r>
-              <a:t>Repetition with Loops</a:t>
-            </a:r>
-          </a:p>
-        </p:txBody>
-      </p:sp>
-      <p:sp>
-        <p:nvSpPr>
-          <p:cNvPr id="5" name="TextBox 4"/>
-          <p:cNvSpPr txBox="1"/>
-          <p:nvPr/>
-        </p:nvSpPr>
-        <p:spPr>
-          <a:xfrm>
-            <a:off x="914400" y="4297680"/>
-            <a:ext cx="10360152" cy="548640"/>
-          </a:xfrm>
-          <a:prstGeom prst="rect">
-            <a:avLst/>
-          </a:prstGeom>
-          <a:noFill/>
-        </p:spPr>
-        <p:txBody>
-          <a:bodyPr wrap="none">
-            <a:spAutoFit/>
-          </a:bodyPr>
-          <a:lstStyle/>
-          <a:p>
-            <a:pPr algn="ctr">
-              <a:defRPr sz="2800">
-                <a:solidFill>
-                  <a:srgbClr val="4682B4"/>
-                </a:solidFill>
-              </a:defRPr>
-            </a:pPr>
-            <a:r>
-              <a:t>Making Programs Work Smarter, Not Harder</a:t>
+              <a:t>Repetition with While and For Loops</a:t>
             </a:r>
           </a:p>
         </p:txBody>
@@ -3362,8 +3325,8 @@
         </p:nvSpPr>
         <p:spPr>
           <a:xfrm>
-            <a:off x="457200" y="365760"/>
-            <a:ext cx="10972800" cy="731520"/>
+            <a:off x="457200" y="320040"/>
+            <a:ext cx="10972800" cy="640080"/>
           </a:xfrm>
           <a:prstGeom prst="rect">
             <a:avLst/>
@@ -3377,71 +3340,28 @@
           <a:lstStyle/>
           <a:p>
             <a:pPr>
-              <a:defRPr sz="4000" b="1">
+              <a:defRPr sz="3600" b="1">
                 <a:solidFill>
                   <a:srgbClr val="003366"/>
                 </a:solidFill>
               </a:defRPr>
             </a:pPr>
             <a:r>
-              <a:t>Continue Statement: Skip Iteration ⏭️</a:t>
-            </a:r>
-          </a:p>
-        </p:txBody>
-      </p:sp>
-      <p:sp>
-        <p:nvSpPr>
-          <p:cNvPr id="5" name="Rectangle 4"/>
-          <p:cNvSpPr/>
+              <a:t>Loop Performance and Infinite Loops</a:t>
+            </a:r>
+          </a:p>
+        </p:txBody>
+      </p:sp>
+      <p:sp>
+        <p:nvSpPr>
+          <p:cNvPr id="5" name="TextBox 4"/>
+          <p:cNvSpPr txBox="1"/>
           <p:nvPr/>
         </p:nvSpPr>
         <p:spPr>
           <a:xfrm>
-            <a:off x="457200" y="1005840"/>
-            <a:ext cx="1828800" cy="45720"/>
-          </a:xfrm>
-          <a:prstGeom prst="rect">
-            <a:avLst/>
-          </a:prstGeom>
-          <a:solidFill>
-            <a:srgbClr val="0066CC"/>
-          </a:solidFill>
-          <a:ln>
-            <a:noFill/>
-          </a:ln>
-        </p:spPr>
-        <p:style>
-          <a:lnRef idx="1">
-            <a:schemeClr val="accent1"/>
-          </a:lnRef>
-          <a:fillRef idx="3">
-            <a:schemeClr val="accent1"/>
-          </a:fillRef>
-          <a:effectRef idx="2">
-            <a:schemeClr val="accent1"/>
-          </a:effectRef>
-          <a:fontRef idx="minor">
-            <a:schemeClr val="lt1"/>
-          </a:fontRef>
-        </p:style>
-        <p:txBody>
-          <a:bodyPr rtlCol="0" anchor="ctr"/>
-          <a:lstStyle/>
-          <a:p>
-            <a:pPr algn="ctr"/>
-          </a:p>
-        </p:txBody>
-      </p:sp>
-      <p:sp>
-        <p:nvSpPr>
-          <p:cNvPr id="6" name="TextBox 5"/>
-          <p:cNvSpPr txBox="1"/>
-          <p:nvPr/>
-        </p:nvSpPr>
-        <p:spPr>
-          <a:xfrm>
-            <a:off x="640080" y="1371600"/>
-            <a:ext cx="10789920" cy="4572000"/>
+            <a:off x="640080" y="1188720"/>
+            <a:ext cx="10789920" cy="5303520"/>
           </a:xfrm>
           <a:prstGeom prst="rect">
             <a:avLst/>
@@ -3456,61 +3376,361 @@
           <a:p>
             <a:pPr>
               <a:spcAft>
-                <a:spcPts val="800"/>
-              </a:spcAft>
-              <a:defRPr sz="2000" b="1">
-                <a:solidFill>
-                  <a:srgbClr val="333333"/>
-                </a:solidFill>
-              </a:defRPr>
-            </a:pPr>
-            <a:r>
-              <a:t>The continue statement skips the rest of the current iteration</a:t>
-            </a:r>
-          </a:p>
-          <a:p>
-            <a:pPr>
-              <a:spcAft>
-                <a:spcPts val="800"/>
-              </a:spcAft>
-              <a:defRPr sz="2000" b="1">
-                <a:solidFill>
-                  <a:srgbClr val="333333"/>
-                </a:solidFill>
-              </a:defRPr>
-            </a:pPr>
-            <a:r>
-              <a:t>Example: Print Only Odd Numbers</a:t>
-            </a:r>
-          </a:p>
-          <a:p>
-            <a:pPr>
-              <a:spcAft>
-                <a:spcPts val="800"/>
-              </a:spcAft>
-              <a:defRPr sz="2000" b="1">
-                <a:solidFill>
-                  <a:srgbClr val="333333"/>
-                </a:solidFill>
-              </a:defRPr>
-            </a:pPr>
-            <a:r>
-              <a:t>Example: Skip Negative Numbers</a:t>
-            </a:r>
-          </a:p>
-          <a:p>
-            <a:pPr>
-              <a:spcAft>
-                <a:spcPts val="800"/>
-              </a:spcAft>
-              <a:defRPr sz="2000" b="1">
-                <a:solidFill>
-                  <a:srgbClr val="333333"/>
-                </a:solidFill>
-              </a:defRPr>
-            </a:pPr>
-            <a:r>
-              <a:t>breakexits the loop completely |continueskips to next iteration</a:t>
+                <a:spcPts val="600"/>
+              </a:spcAft>
+              <a:defRPr b="1" sz="2000">
+                <a:solidFill>
+                  <a:srgbClr val="333333"/>
+                </a:solidFill>
+              </a:defRPr>
+            </a:pPr>
+            <a:r>
+              <a:t>Infinite Loop: Loop Never Ends</a:t>
+            </a:r>
+          </a:p>
+          <a:p>
+            <a:pPr>
+              <a:spcAft>
+                <a:spcPts val="600"/>
+              </a:spcAft>
+              <a:defRPr b="1" sz="2000">
+                <a:solidFill>
+                  <a:srgbClr val="333333"/>
+                </a:solidFill>
+              </a:defRPr>
+            </a:pPr>
+            <a:r>
+              <a:t>Common Causes:</a:t>
+            </a:r>
+          </a:p>
+          <a:p>
+            <a:pPr>
+              <a:spcAft>
+                <a:spcPts val="600"/>
+              </a:spcAft>
+              <a:defRPr b="1" sz="2000">
+                <a:solidFill>
+                  <a:srgbClr val="333333"/>
+                </a:solidFill>
+              </a:defRPr>
+            </a:pPr>
+            <a:r>
+              <a:t>1. Forgot to Update Counter:</a:t>
+            </a:r>
+          </a:p>
+          <a:p>
+            <a:pPr>
+              <a:spcAft>
+                <a:spcPts val="600"/>
+              </a:spcAft>
+              <a:defRPr sz="1600">
+                <a:solidFill>
+                  <a:srgbClr val="333333"/>
+                </a:solidFill>
+              </a:defRPr>
+            </a:pPr>
+            <a:r>
+              <a:t>count = 0</a:t>
+            </a:r>
+          </a:p>
+          <a:p>
+            <a:pPr>
+              <a:spcAft>
+                <a:spcPts val="600"/>
+              </a:spcAft>
+              <a:defRPr b="1" sz="2000">
+                <a:solidFill>
+                  <a:srgbClr val="333333"/>
+                </a:solidFill>
+              </a:defRPr>
+            </a:pPr>
+            <a:r>
+              <a:t>while count &lt; 5:</a:t>
+            </a:r>
+          </a:p>
+          <a:p>
+            <a:pPr>
+              <a:spcAft>
+                <a:spcPts val="600"/>
+              </a:spcAft>
+              <a:defRPr sz="1600">
+                <a:solidFill>
+                  <a:srgbClr val="333333"/>
+                </a:solidFill>
+              </a:defRPr>
+            </a:pPr>
+            <a:r>
+              <a:t>    print(count)</a:t>
+            </a:r>
+          </a:p>
+          <a:p>
+            <a:pPr>
+              <a:spcAft>
+                <a:spcPts val="600"/>
+              </a:spcAft>
+              <a:defRPr sz="1600">
+                <a:solidFill>
+                  <a:srgbClr val="333333"/>
+                </a:solidFill>
+              </a:defRPr>
+            </a:pPr>
+            <a:r>
+              <a:t>    # Missing: count += 1</a:t>
+            </a:r>
+          </a:p>
+          <a:p>
+            <a:pPr>
+              <a:spcAft>
+                <a:spcPts val="600"/>
+              </a:spcAft>
+              <a:defRPr b="1" sz="2000">
+                <a:solidFill>
+                  <a:srgbClr val="333333"/>
+                </a:solidFill>
+              </a:defRPr>
+            </a:pPr>
+            <a:r>
+              <a:t>2. Wrong Update:</a:t>
+            </a:r>
+          </a:p>
+          <a:p>
+            <a:pPr>
+              <a:spcAft>
+                <a:spcPts val="600"/>
+              </a:spcAft>
+              <a:defRPr sz="1600">
+                <a:solidFill>
+                  <a:srgbClr val="333333"/>
+                </a:solidFill>
+              </a:defRPr>
+            </a:pPr>
+            <a:r>
+              <a:t>count = 0</a:t>
+            </a:r>
+          </a:p>
+          <a:p>
+            <a:pPr>
+              <a:spcAft>
+                <a:spcPts val="600"/>
+              </a:spcAft>
+              <a:defRPr b="1" sz="2000">
+                <a:solidFill>
+                  <a:srgbClr val="333333"/>
+                </a:solidFill>
+              </a:defRPr>
+            </a:pPr>
+            <a:r>
+              <a:t>while count &lt; 5:</a:t>
+            </a:r>
+          </a:p>
+          <a:p>
+            <a:pPr>
+              <a:spcAft>
+                <a:spcPts val="600"/>
+              </a:spcAft>
+              <a:defRPr sz="1600">
+                <a:solidFill>
+                  <a:srgbClr val="333333"/>
+                </a:solidFill>
+              </a:defRPr>
+            </a:pPr>
+            <a:r>
+              <a:t>    print(count)</a:t>
+            </a:r>
+          </a:p>
+          <a:p>
+            <a:pPr>
+              <a:spcAft>
+                <a:spcPts val="600"/>
+              </a:spcAft>
+              <a:defRPr sz="1600">
+                <a:solidFill>
+                  <a:srgbClr val="333333"/>
+                </a:solidFill>
+              </a:defRPr>
+            </a:pPr>
+            <a:r>
+              <a:t>    count -= 1  # Goes backwards!</a:t>
+            </a:r>
+          </a:p>
+          <a:p>
+            <a:pPr>
+              <a:spcAft>
+                <a:spcPts val="600"/>
+              </a:spcAft>
+              <a:defRPr b="1" sz="2000">
+                <a:solidFill>
+                  <a:srgbClr val="333333"/>
+                </a:solidFill>
+              </a:defRPr>
+            </a:pPr>
+            <a:r>
+              <a:t>3. Condition Never False:</a:t>
+            </a:r>
+          </a:p>
+          <a:p>
+            <a:pPr>
+              <a:spcAft>
+                <a:spcPts val="600"/>
+              </a:spcAft>
+              <a:defRPr b="1" sz="2000">
+                <a:solidFill>
+                  <a:srgbClr val="333333"/>
+                </a:solidFill>
+              </a:defRPr>
+            </a:pPr>
+            <a:r>
+              <a:t>while True:</a:t>
+            </a:r>
+          </a:p>
+          <a:p>
+            <a:pPr>
+              <a:spcAft>
+                <a:spcPts val="600"/>
+              </a:spcAft>
+              <a:defRPr sz="1600">
+                <a:solidFill>
+                  <a:srgbClr val="333333"/>
+                </a:solidFill>
+              </a:defRPr>
+            </a:pPr>
+            <a:r>
+              <a:t>    print("Forever")</a:t>
+            </a:r>
+          </a:p>
+          <a:p>
+            <a:pPr>
+              <a:spcAft>
+                <a:spcPts val="600"/>
+              </a:spcAft>
+              <a:defRPr sz="1600">
+                <a:solidFill>
+                  <a:srgbClr val="333333"/>
+                </a:solidFill>
+              </a:defRPr>
+            </a:pPr>
+            <a:r>
+              <a:t>    # No break statement</a:t>
+            </a:r>
+          </a:p>
+          <a:p>
+            <a:pPr>
+              <a:spcAft>
+                <a:spcPts val="600"/>
+              </a:spcAft>
+              <a:defRPr b="1" sz="2000">
+                <a:solidFill>
+                  <a:srgbClr val="333333"/>
+                </a:solidFill>
+              </a:defRPr>
+            </a:pPr>
+            <a:r>
+              <a:t>How to Stop Infinite Loop:</a:t>
+            </a:r>
+          </a:p>
+          <a:p>
+            <a:pPr lvl="1">
+              <a:spcAft>
+                <a:spcPts val="400"/>
+              </a:spcAft>
+              <a:defRPr sz="1600">
+                <a:solidFill>
+                  <a:srgbClr val="333333"/>
+                </a:solidFill>
+              </a:defRPr>
+            </a:pPr>
+            <a:r>
+              <a:t>• Press Ctrl+C in terminal</a:t>
+            </a:r>
+          </a:p>
+          <a:p>
+            <a:pPr lvl="1">
+              <a:spcAft>
+                <a:spcPts val="400"/>
+              </a:spcAft>
+              <a:defRPr sz="1600">
+                <a:solidFill>
+                  <a:srgbClr val="333333"/>
+                </a:solidFill>
+              </a:defRPr>
+            </a:pPr>
+            <a:r>
+              <a:t>• Stop button in Jupyter/Colab</a:t>
+            </a:r>
+          </a:p>
+          <a:p>
+            <a:pPr>
+              <a:spcAft>
+                <a:spcPts val="600"/>
+              </a:spcAft>
+              <a:defRPr b="1" sz="2000">
+                <a:solidFill>
+                  <a:srgbClr val="333333"/>
+                </a:solidFill>
+              </a:defRPr>
+            </a:pPr>
+            <a:r>
+              <a:t>Prevention:</a:t>
+            </a:r>
+          </a:p>
+          <a:p>
+            <a:pPr lvl="1">
+              <a:spcAft>
+                <a:spcPts val="400"/>
+              </a:spcAft>
+              <a:defRPr sz="1600">
+                <a:solidFill>
+                  <a:srgbClr val="333333"/>
+                </a:solidFill>
+              </a:defRPr>
+            </a:pPr>
+            <a:r>
+              <a:t>• Always update loop variable</a:t>
+            </a:r>
+          </a:p>
+          <a:p>
+            <a:pPr lvl="1">
+              <a:spcAft>
+                <a:spcPts val="400"/>
+              </a:spcAft>
+              <a:defRPr sz="1600">
+                <a:solidFill>
+                  <a:srgbClr val="333333"/>
+                </a:solidFill>
+              </a:defRPr>
+            </a:pPr>
+            <a:r>
+              <a:t>• Use break for while True loops</a:t>
+            </a:r>
+          </a:p>
+          <a:p>
+            <a:pPr lvl="1">
+              <a:spcAft>
+                <a:spcPts val="400"/>
+              </a:spcAft>
+              <a:defRPr sz="1600">
+                <a:solidFill>
+                  <a:srgbClr val="333333"/>
+                </a:solidFill>
+              </a:defRPr>
+            </a:pPr>
+            <a:r>
+              <a:t>• Test with small iterations first</a:t>
+            </a:r>
+          </a:p>
+          <a:p>
+            <a:pPr lvl="1">
+              <a:spcAft>
+                <a:spcPts val="400"/>
+              </a:spcAft>
+              <a:defRPr sz="1600">
+                <a:solidFill>
+                  <a:srgbClr val="333333"/>
+                </a:solidFill>
+              </a:defRPr>
+            </a:pPr>
+            <a:r>
+              <a:t>• Add safety counter if needed</a:t>
             </a:r>
           </a:p>
         </p:txBody>
@@ -3627,8 +3847,8 @@
         </p:nvSpPr>
         <p:spPr>
           <a:xfrm>
-            <a:off x="457200" y="365760"/>
-            <a:ext cx="10972800" cy="731520"/>
+            <a:off x="457200" y="320040"/>
+            <a:ext cx="10972800" cy="640080"/>
           </a:xfrm>
           <a:prstGeom prst="rect">
             <a:avLst/>
@@ -3642,71 +3862,28 @@
           <a:lstStyle/>
           <a:p>
             <a:pPr>
-              <a:defRPr sz="4000" b="1">
+              <a:defRPr sz="3600" b="1">
                 <a:solidFill>
                   <a:srgbClr val="003366"/>
                 </a:solidFill>
               </a:defRPr>
             </a:pPr>
             <a:r>
-              <a:t>Nested Loops: Loops Inside Loops 🔄🔄</a:t>
-            </a:r>
-          </a:p>
-        </p:txBody>
-      </p:sp>
-      <p:sp>
-        <p:nvSpPr>
-          <p:cNvPr id="5" name="Rectangle 4"/>
-          <p:cNvSpPr/>
+              <a:t>Choosing: While vs For</a:t>
+            </a:r>
+          </a:p>
+        </p:txBody>
+      </p:sp>
+      <p:sp>
+        <p:nvSpPr>
+          <p:cNvPr id="5" name="TextBox 4"/>
+          <p:cNvSpPr txBox="1"/>
           <p:nvPr/>
         </p:nvSpPr>
         <p:spPr>
           <a:xfrm>
-            <a:off x="457200" y="1005840"/>
-            <a:ext cx="1828800" cy="45720"/>
-          </a:xfrm>
-          <a:prstGeom prst="rect">
-            <a:avLst/>
-          </a:prstGeom>
-          <a:solidFill>
-            <a:srgbClr val="0066CC"/>
-          </a:solidFill>
-          <a:ln>
-            <a:noFill/>
-          </a:ln>
-        </p:spPr>
-        <p:style>
-          <a:lnRef idx="1">
-            <a:schemeClr val="accent1"/>
-          </a:lnRef>
-          <a:fillRef idx="3">
-            <a:schemeClr val="accent1"/>
-          </a:fillRef>
-          <a:effectRef idx="2">
-            <a:schemeClr val="accent1"/>
-          </a:effectRef>
-          <a:fontRef idx="minor">
-            <a:schemeClr val="lt1"/>
-          </a:fontRef>
-        </p:style>
-        <p:txBody>
-          <a:bodyPr rtlCol="0" anchor="ctr"/>
-          <a:lstStyle/>
-          <a:p>
-            <a:pPr algn="ctr"/>
-          </a:p>
-        </p:txBody>
-      </p:sp>
-      <p:sp>
-        <p:nvSpPr>
-          <p:cNvPr id="6" name="TextBox 5"/>
-          <p:cNvSpPr txBox="1"/>
-          <p:nvPr/>
-        </p:nvSpPr>
-        <p:spPr>
-          <a:xfrm>
-            <a:off x="640080" y="1371600"/>
-            <a:ext cx="10789920" cy="4572000"/>
+            <a:off x="640080" y="1188720"/>
+            <a:ext cx="10789920" cy="5303520"/>
           </a:xfrm>
           <a:prstGeom prst="rect">
             <a:avLst/>
@@ -3721,61 +3898,316 @@
           <a:p>
             <a:pPr>
               <a:spcAft>
-                <a:spcPts val="800"/>
-              </a:spcAft>
-              <a:defRPr sz="2000" b="1">
-                <a:solidFill>
-                  <a:srgbClr val="333333"/>
-                </a:solidFill>
-              </a:defRPr>
-            </a:pPr>
-            <a:r>
-              <a:t>You can put loops inside other loops!</a:t>
-            </a:r>
-          </a:p>
-          <a:p>
-            <a:pPr>
-              <a:spcAft>
-                <a:spcPts val="800"/>
-              </a:spcAft>
-              <a:defRPr sz="2000" b="1">
-                <a:solidFill>
-                  <a:srgbClr val="333333"/>
-                </a:solidFill>
-              </a:defRPr>
-            </a:pPr>
-            <a:r>
-              <a:t>Example: Multiplication Table</a:t>
-            </a:r>
-          </a:p>
-          <a:p>
-            <a:pPr>
-              <a:spcAft>
-                <a:spcPts val="800"/>
-              </a:spcAft>
-              <a:defRPr sz="2000" b="1">
-                <a:solidFill>
-                  <a:srgbClr val="333333"/>
-                </a:solidFill>
-              </a:defRPr>
-            </a:pPr>
-            <a:r>
-              <a:t>Pattern: Rectangle</a:t>
-            </a:r>
-          </a:p>
-          <a:p>
-            <a:pPr>
-              <a:spcAft>
-                <a:spcPts val="800"/>
-              </a:spcAft>
-              <a:defRPr sz="2000" b="1">
-                <a:solidFill>
-                  <a:srgbClr val="333333"/>
-                </a:solidFill>
-              </a:defRPr>
-            </a:pPr>
-            <a:r>
-              <a:t>Output:</a:t>
+                <a:spcPts val="600"/>
+              </a:spcAft>
+              <a:defRPr b="1" sz="2000">
+                <a:solidFill>
+                  <a:srgbClr val="333333"/>
+                </a:solidFill>
+              </a:defRPr>
+            </a:pPr>
+            <a:r>
+              <a:t>Use for loop when:</a:t>
+            </a:r>
+          </a:p>
+          <a:p>
+            <a:pPr lvl="1">
+              <a:spcAft>
+                <a:spcPts val="400"/>
+              </a:spcAft>
+              <a:defRPr sz="1600">
+                <a:solidFill>
+                  <a:srgbClr val="333333"/>
+                </a:solidFill>
+              </a:defRPr>
+            </a:pPr>
+            <a:r>
+              <a:t>• You know how many iterations</a:t>
+            </a:r>
+          </a:p>
+          <a:p>
+            <a:pPr lvl="1">
+              <a:spcAft>
+                <a:spcPts val="400"/>
+              </a:spcAft>
+              <a:defRPr sz="1600">
+                <a:solidFill>
+                  <a:srgbClr val="333333"/>
+                </a:solidFill>
+              </a:defRPr>
+            </a:pPr>
+            <a:r>
+              <a:t>• Iterating through a collection</a:t>
+            </a:r>
+          </a:p>
+          <a:p>
+            <a:pPr lvl="1">
+              <a:spcAft>
+                <a:spcPts val="400"/>
+              </a:spcAft>
+              <a:defRPr sz="1600">
+                <a:solidFill>
+                  <a:srgbClr val="333333"/>
+                </a:solidFill>
+              </a:defRPr>
+            </a:pPr>
+            <a:r>
+              <a:t>• Using range() with known size</a:t>
+            </a:r>
+          </a:p>
+          <a:p>
+            <a:pPr>
+              <a:spcAft>
+                <a:spcPts val="600"/>
+              </a:spcAft>
+              <a:defRPr b="1" sz="2000">
+                <a:solidFill>
+                  <a:srgbClr val="333333"/>
+                </a:solidFill>
+              </a:defRPr>
+            </a:pPr>
+            <a:r>
+              <a:t>for Examples:</a:t>
+            </a:r>
+          </a:p>
+          <a:p>
+            <a:pPr>
+              <a:spcAft>
+                <a:spcPts val="600"/>
+              </a:spcAft>
+              <a:defRPr b="1" sz="2000">
+                <a:solidFill>
+                  <a:srgbClr val="333333"/>
+                </a:solidFill>
+              </a:defRPr>
+            </a:pPr>
+            <a:r>
+              <a:t>for i in range(10):  # Repeat 10 times</a:t>
+            </a:r>
+          </a:p>
+          <a:p>
+            <a:pPr>
+              <a:spcAft>
+                <a:spcPts val="600"/>
+              </a:spcAft>
+              <a:defRPr b="1" sz="2000">
+                <a:solidFill>
+                  <a:srgbClr val="333333"/>
+                </a:solidFill>
+              </a:defRPr>
+            </a:pPr>
+            <a:r>
+              <a:t>for item in my_list:  # Process all items</a:t>
+            </a:r>
+          </a:p>
+          <a:p>
+            <a:pPr>
+              <a:spcAft>
+                <a:spcPts val="600"/>
+              </a:spcAft>
+              <a:defRPr b="1" sz="2000">
+                <a:solidFill>
+                  <a:srgbClr val="333333"/>
+                </a:solidFill>
+              </a:defRPr>
+            </a:pPr>
+            <a:r>
+              <a:t>for char in "Hello":  # Each character</a:t>
+            </a:r>
+          </a:p>
+          <a:p>
+            <a:pPr>
+              <a:spcAft>
+                <a:spcPts val="600"/>
+              </a:spcAft>
+              <a:defRPr b="1" sz="2000">
+                <a:solidFill>
+                  <a:srgbClr val="333333"/>
+                </a:solidFill>
+              </a:defRPr>
+            </a:pPr>
+            <a:r>
+              <a:t>Use while loop when:</a:t>
+            </a:r>
+          </a:p>
+          <a:p>
+            <a:pPr lvl="1">
+              <a:spcAft>
+                <a:spcPts val="400"/>
+              </a:spcAft>
+              <a:defRPr sz="1600">
+                <a:solidFill>
+                  <a:srgbClr val="333333"/>
+                </a:solidFill>
+              </a:defRPr>
+            </a:pPr>
+            <a:r>
+              <a:t>• Unknown number of iterations</a:t>
+            </a:r>
+          </a:p>
+          <a:p>
+            <a:pPr lvl="1">
+              <a:spcAft>
+                <a:spcPts val="400"/>
+              </a:spcAft>
+              <a:defRPr sz="1600">
+                <a:solidFill>
+                  <a:srgbClr val="333333"/>
+                </a:solidFill>
+              </a:defRPr>
+            </a:pPr>
+            <a:r>
+              <a:t>• Condition-based repetition</a:t>
+            </a:r>
+          </a:p>
+          <a:p>
+            <a:pPr lvl="1">
+              <a:spcAft>
+                <a:spcPts val="400"/>
+              </a:spcAft>
+              <a:defRPr sz="1600">
+                <a:solidFill>
+                  <a:srgbClr val="333333"/>
+                </a:solidFill>
+              </a:defRPr>
+            </a:pPr>
+            <a:r>
+              <a:t>• User input loops</a:t>
+            </a:r>
+          </a:p>
+          <a:p>
+            <a:pPr lvl="1">
+              <a:spcAft>
+                <a:spcPts val="400"/>
+              </a:spcAft>
+              <a:defRPr sz="1600">
+                <a:solidFill>
+                  <a:srgbClr val="333333"/>
+                </a:solidFill>
+              </a:defRPr>
+            </a:pPr>
+            <a:r>
+              <a:t>• "Until something happens"</a:t>
+            </a:r>
+          </a:p>
+          <a:p>
+            <a:pPr>
+              <a:spcAft>
+                <a:spcPts val="600"/>
+              </a:spcAft>
+              <a:defRPr b="1" sz="2000">
+                <a:solidFill>
+                  <a:srgbClr val="333333"/>
+                </a:solidFill>
+              </a:defRPr>
+            </a:pPr>
+            <a:r>
+              <a:t>while Examples:</a:t>
+            </a:r>
+          </a:p>
+          <a:p>
+            <a:pPr>
+              <a:spcAft>
+                <a:spcPts val="600"/>
+              </a:spcAft>
+              <a:defRPr b="1" sz="2000">
+                <a:solidFill>
+                  <a:srgbClr val="333333"/>
+                </a:solidFill>
+              </a:defRPr>
+            </a:pPr>
+            <a:r>
+              <a:t>while password != "correct":  # Until correct</a:t>
+            </a:r>
+          </a:p>
+          <a:p>
+            <a:pPr>
+              <a:spcAft>
+                <a:spcPts val="600"/>
+              </a:spcAft>
+              <a:defRPr b="1" sz="2000">
+                <a:solidFill>
+                  <a:srgbClr val="333333"/>
+                </a:solidFill>
+              </a:defRPr>
+            </a:pPr>
+            <a:r>
+              <a:t>while playing:  # Until game ends</a:t>
+            </a:r>
+          </a:p>
+          <a:p>
+            <a:pPr>
+              <a:spcAft>
+                <a:spcPts val="600"/>
+              </a:spcAft>
+              <a:defRPr b="1" sz="2000">
+                <a:solidFill>
+                  <a:srgbClr val="333333"/>
+                </a:solidFill>
+              </a:defRPr>
+            </a:pPr>
+            <a:r>
+              <a:t>while data_available:  # Until no more data</a:t>
+            </a:r>
+          </a:p>
+          <a:p>
+            <a:pPr>
+              <a:spcAft>
+                <a:spcPts val="600"/>
+              </a:spcAft>
+              <a:defRPr b="1" sz="2000">
+                <a:solidFill>
+                  <a:srgbClr val="333333"/>
+                </a:solidFill>
+              </a:defRPr>
+            </a:pPr>
+            <a:r>
+              <a:t>Rule of Thumb:</a:t>
+            </a:r>
+          </a:p>
+          <a:p>
+            <a:pPr lvl="1">
+              <a:spcAft>
+                <a:spcPts val="400"/>
+              </a:spcAft>
+              <a:defRPr sz="1600">
+                <a:solidFill>
+                  <a:srgbClr val="333333"/>
+                </a:solidFill>
+              </a:defRPr>
+            </a:pPr>
+            <a:r>
+              <a:t>• Default to for loops</a:t>
+            </a:r>
+          </a:p>
+          <a:p>
+            <a:pPr lvl="1">
+              <a:spcAft>
+                <a:spcPts val="400"/>
+              </a:spcAft>
+              <a:defRPr sz="1600">
+                <a:solidFill>
+                  <a:srgbClr val="333333"/>
+                </a:solidFill>
+              </a:defRPr>
+            </a:pPr>
+            <a:r>
+              <a:t>• Use while for uncertain iterations</a:t>
+            </a:r>
+          </a:p>
+          <a:p>
+            <a:pPr lvl="1">
+              <a:spcAft>
+                <a:spcPts val="400"/>
+              </a:spcAft>
+              <a:defRPr sz="1600">
+                <a:solidFill>
+                  <a:srgbClr val="333333"/>
+                </a:solidFill>
+              </a:defRPr>
+            </a:pPr>
+            <a:r>
+              <a:t>• for loops are often clearer and safer</a:t>
             </a:r>
           </a:p>
         </p:txBody>
@@ -3892,8 +4324,8 @@
         </p:nvSpPr>
         <p:spPr>
           <a:xfrm>
-            <a:off x="457200" y="365760"/>
-            <a:ext cx="10972800" cy="731520"/>
+            <a:off x="457200" y="320040"/>
+            <a:ext cx="10972800" cy="640080"/>
           </a:xfrm>
           <a:prstGeom prst="rect">
             <a:avLst/>
@@ -3907,71 +4339,28 @@
           <a:lstStyle/>
           <a:p>
             <a:pPr>
-              <a:defRPr sz="4000" b="1">
+              <a:defRPr sz="3600" b="1">
                 <a:solidFill>
                   <a:srgbClr val="003366"/>
                 </a:solidFill>
               </a:defRPr>
             </a:pPr>
             <a:r>
-              <a:t>Real-World Applications 🌍</a:t>
-            </a:r>
-          </a:p>
-        </p:txBody>
-      </p:sp>
-      <p:sp>
-        <p:nvSpPr>
-          <p:cNvPr id="5" name="Rectangle 4"/>
-          <p:cNvSpPr/>
+              <a:t>Common Loop Patterns</a:t>
+            </a:r>
+          </a:p>
+        </p:txBody>
+      </p:sp>
+      <p:sp>
+        <p:nvSpPr>
+          <p:cNvPr id="5" name="TextBox 4"/>
+          <p:cNvSpPr txBox="1"/>
           <p:nvPr/>
         </p:nvSpPr>
         <p:spPr>
           <a:xfrm>
-            <a:off x="457200" y="1005840"/>
-            <a:ext cx="1828800" cy="45720"/>
-          </a:xfrm>
-          <a:prstGeom prst="rect">
-            <a:avLst/>
-          </a:prstGeom>
-          <a:solidFill>
-            <a:srgbClr val="0066CC"/>
-          </a:solidFill>
-          <a:ln>
-            <a:noFill/>
-          </a:ln>
-        </p:spPr>
-        <p:style>
-          <a:lnRef idx="1">
-            <a:schemeClr val="accent1"/>
-          </a:lnRef>
-          <a:fillRef idx="3">
-            <a:schemeClr val="accent1"/>
-          </a:fillRef>
-          <a:effectRef idx="2">
-            <a:schemeClr val="accent1"/>
-          </a:effectRef>
-          <a:fontRef idx="minor">
-            <a:schemeClr val="lt1"/>
-          </a:fontRef>
-        </p:style>
-        <p:txBody>
-          <a:bodyPr rtlCol="0" anchor="ctr"/>
-          <a:lstStyle/>
-          <a:p>
-            <a:pPr algn="ctr"/>
-          </a:p>
-        </p:txBody>
-      </p:sp>
-      <p:sp>
-        <p:nvSpPr>
-          <p:cNvPr id="6" name="TextBox 5"/>
-          <p:cNvSpPr txBox="1"/>
-          <p:nvPr/>
-        </p:nvSpPr>
-        <p:spPr>
-          <a:xfrm>
-            <a:off x="640080" y="1371600"/>
-            <a:ext cx="10789920" cy="4572000"/>
+            <a:off x="640080" y="1188720"/>
+            <a:ext cx="10789920" cy="5303520"/>
           </a:xfrm>
           <a:prstGeom prst="rect">
             <a:avLst/>
@@ -3986,46 +4375,451 @@
           <a:p>
             <a:pPr>
               <a:spcAft>
-                <a:spcPts val="800"/>
-              </a:spcAft>
-              <a:defRPr sz="2000" b="1">
-                <a:solidFill>
-                  <a:srgbClr val="333333"/>
-                </a:solidFill>
-              </a:defRPr>
-            </a:pPr>
-            <a:r>
-              <a:t>Sum of Numbers</a:t>
-            </a:r>
-          </a:p>
-          <a:p>
-            <a:pPr>
-              <a:spcAft>
-                <a:spcPts val="800"/>
-              </a:spcAft>
-              <a:defRPr sz="2000" b="1">
-                <a:solidFill>
-                  <a:srgbClr val="333333"/>
-                </a:solidFill>
-              </a:defRPr>
-            </a:pPr>
-            <a:r>
-              <a:t>Average Calculator</a:t>
-            </a:r>
-          </a:p>
-          <a:p>
-            <a:pPr>
-              <a:spcAft>
-                <a:spcPts val="800"/>
-              </a:spcAft>
-              <a:defRPr sz="2000" b="1">
-                <a:solidFill>
-                  <a:srgbClr val="333333"/>
-                </a:solidFill>
-              </a:defRPr>
-            </a:pPr>
-            <a:r>
-              <a:t>Factorial Calculator</a:t>
+                <a:spcPts val="600"/>
+              </a:spcAft>
+              <a:defRPr b="1" sz="2000">
+                <a:solidFill>
+                  <a:srgbClr val="333333"/>
+                </a:solidFill>
+              </a:defRPr>
+            </a:pPr>
+            <a:r>
+              <a:t>Pattern 1: Accumulator</a:t>
+            </a:r>
+          </a:p>
+          <a:p>
+            <a:pPr>
+              <a:spcAft>
+                <a:spcPts val="600"/>
+              </a:spcAft>
+              <a:defRPr sz="1600">
+                <a:solidFill>
+                  <a:srgbClr val="333333"/>
+                </a:solidFill>
+              </a:defRPr>
+            </a:pPr>
+            <a:r>
+              <a:t>total = 0</a:t>
+            </a:r>
+          </a:p>
+          <a:p>
+            <a:pPr>
+              <a:spcAft>
+                <a:spcPts val="600"/>
+              </a:spcAft>
+              <a:defRPr b="1" sz="2000">
+                <a:solidFill>
+                  <a:srgbClr val="333333"/>
+                </a:solidFill>
+              </a:defRPr>
+            </a:pPr>
+            <a:r>
+              <a:t>for num in range(1, 11):</a:t>
+            </a:r>
+          </a:p>
+          <a:p>
+            <a:pPr>
+              <a:spcAft>
+                <a:spcPts val="600"/>
+              </a:spcAft>
+              <a:defRPr sz="1600">
+                <a:solidFill>
+                  <a:srgbClr val="333333"/>
+                </a:solidFill>
+              </a:defRPr>
+            </a:pPr>
+            <a:r>
+              <a:t>    total += num</a:t>
+            </a:r>
+          </a:p>
+          <a:p>
+            <a:pPr>
+              <a:spcAft>
+                <a:spcPts val="600"/>
+              </a:spcAft>
+              <a:defRPr b="1" sz="2000">
+                <a:solidFill>
+                  <a:srgbClr val="333333"/>
+                </a:solidFill>
+              </a:defRPr>
+            </a:pPr>
+            <a:r>
+              <a:t>Pattern 2: Counter</a:t>
+            </a:r>
+          </a:p>
+          <a:p>
+            <a:pPr>
+              <a:spcAft>
+                <a:spcPts val="600"/>
+              </a:spcAft>
+              <a:defRPr sz="1600">
+                <a:solidFill>
+                  <a:srgbClr val="333333"/>
+                </a:solidFill>
+              </a:defRPr>
+            </a:pPr>
+            <a:r>
+              <a:t>count = 0</a:t>
+            </a:r>
+          </a:p>
+          <a:p>
+            <a:pPr>
+              <a:spcAft>
+                <a:spcPts val="600"/>
+              </a:spcAft>
+              <a:defRPr b="1" sz="2000">
+                <a:solidFill>
+                  <a:srgbClr val="333333"/>
+                </a:solidFill>
+              </a:defRPr>
+            </a:pPr>
+            <a:r>
+              <a:t>for item in items:</a:t>
+            </a:r>
+          </a:p>
+          <a:p>
+            <a:pPr>
+              <a:spcAft>
+                <a:spcPts val="600"/>
+              </a:spcAft>
+              <a:defRPr sz="1600">
+                <a:solidFill>
+                  <a:srgbClr val="333333"/>
+                </a:solidFill>
+              </a:defRPr>
+            </a:pPr>
+            <a:r>
+              <a:t>    if condition:</a:t>
+            </a:r>
+          </a:p>
+          <a:p>
+            <a:pPr>
+              <a:spcAft>
+                <a:spcPts val="600"/>
+              </a:spcAft>
+              <a:defRPr sz="1600">
+                <a:solidFill>
+                  <a:srgbClr val="333333"/>
+                </a:solidFill>
+              </a:defRPr>
+            </a:pPr>
+            <a:r>
+              <a:t>        count += 1</a:t>
+            </a:r>
+          </a:p>
+          <a:p>
+            <a:pPr>
+              <a:spcAft>
+                <a:spcPts val="600"/>
+              </a:spcAft>
+              <a:defRPr b="1" sz="2000">
+                <a:solidFill>
+                  <a:srgbClr val="333333"/>
+                </a:solidFill>
+              </a:defRPr>
+            </a:pPr>
+            <a:r>
+              <a:t>Pattern 3: Find First</a:t>
+            </a:r>
+          </a:p>
+          <a:p>
+            <a:pPr>
+              <a:spcAft>
+                <a:spcPts val="600"/>
+              </a:spcAft>
+              <a:defRPr b="1" sz="2000">
+                <a:solidFill>
+                  <a:srgbClr val="333333"/>
+                </a:solidFill>
+              </a:defRPr>
+            </a:pPr>
+            <a:r>
+              <a:t>for item in items:</a:t>
+            </a:r>
+          </a:p>
+          <a:p>
+            <a:pPr>
+              <a:spcAft>
+                <a:spcPts val="600"/>
+              </a:spcAft>
+              <a:defRPr sz="1600">
+                <a:solidFill>
+                  <a:srgbClr val="333333"/>
+                </a:solidFill>
+              </a:defRPr>
+            </a:pPr>
+            <a:r>
+              <a:t>    if item == target:</a:t>
+            </a:r>
+          </a:p>
+          <a:p>
+            <a:pPr>
+              <a:spcAft>
+                <a:spcPts val="600"/>
+              </a:spcAft>
+              <a:defRPr sz="1600">
+                <a:solidFill>
+                  <a:srgbClr val="333333"/>
+                </a:solidFill>
+              </a:defRPr>
+            </a:pPr>
+            <a:r>
+              <a:t>        found = True</a:t>
+            </a:r>
+          </a:p>
+          <a:p>
+            <a:pPr>
+              <a:spcAft>
+                <a:spcPts val="600"/>
+              </a:spcAft>
+              <a:defRPr sz="1600">
+                <a:solidFill>
+                  <a:srgbClr val="333333"/>
+                </a:solidFill>
+              </a:defRPr>
+            </a:pPr>
+            <a:r>
+              <a:t>        break</a:t>
+            </a:r>
+          </a:p>
+          <a:p>
+            <a:pPr>
+              <a:spcAft>
+                <a:spcPts val="600"/>
+              </a:spcAft>
+              <a:defRPr b="1" sz="2000">
+                <a:solidFill>
+                  <a:srgbClr val="333333"/>
+                </a:solidFill>
+              </a:defRPr>
+            </a:pPr>
+            <a:r>
+              <a:t>Pattern 4: Build List</a:t>
+            </a:r>
+          </a:p>
+          <a:p>
+            <a:pPr>
+              <a:spcAft>
+                <a:spcPts val="600"/>
+              </a:spcAft>
+              <a:defRPr sz="1600">
+                <a:solidFill>
+                  <a:srgbClr val="333333"/>
+                </a:solidFill>
+              </a:defRPr>
+            </a:pPr>
+            <a:r>
+              <a:t>results = []</a:t>
+            </a:r>
+          </a:p>
+          <a:p>
+            <a:pPr>
+              <a:spcAft>
+                <a:spcPts val="600"/>
+              </a:spcAft>
+              <a:defRPr b="1" sz="2000">
+                <a:solidFill>
+                  <a:srgbClr val="333333"/>
+                </a:solidFill>
+              </a:defRPr>
+            </a:pPr>
+            <a:r>
+              <a:t>for i in range(10):</a:t>
+            </a:r>
+          </a:p>
+          <a:p>
+            <a:pPr>
+              <a:spcAft>
+                <a:spcPts val="600"/>
+              </a:spcAft>
+              <a:defRPr sz="1600">
+                <a:solidFill>
+                  <a:srgbClr val="333333"/>
+                </a:solidFill>
+              </a:defRPr>
+            </a:pPr>
+            <a:r>
+              <a:t>    results.append(i * 2)</a:t>
+            </a:r>
+          </a:p>
+          <a:p>
+            <a:pPr>
+              <a:spcAft>
+                <a:spcPts val="600"/>
+              </a:spcAft>
+              <a:defRPr b="1" sz="2000">
+                <a:solidFill>
+                  <a:srgbClr val="333333"/>
+                </a:solidFill>
+              </a:defRPr>
+            </a:pPr>
+            <a:r>
+              <a:t>Pattern 5: Menu Loop</a:t>
+            </a:r>
+          </a:p>
+          <a:p>
+            <a:pPr>
+              <a:spcAft>
+                <a:spcPts val="600"/>
+              </a:spcAft>
+              <a:defRPr b="1" sz="2000">
+                <a:solidFill>
+                  <a:srgbClr val="333333"/>
+                </a:solidFill>
+              </a:defRPr>
+            </a:pPr>
+            <a:r>
+              <a:t>while True:</a:t>
+            </a:r>
+          </a:p>
+          <a:p>
+            <a:pPr>
+              <a:spcAft>
+                <a:spcPts val="600"/>
+              </a:spcAft>
+              <a:defRPr sz="1600">
+                <a:solidFill>
+                  <a:srgbClr val="333333"/>
+                </a:solidFill>
+              </a:defRPr>
+            </a:pPr>
+            <a:r>
+              <a:t>    choice = input("Choice: ")</a:t>
+            </a:r>
+          </a:p>
+          <a:p>
+            <a:pPr>
+              <a:spcAft>
+                <a:spcPts val="600"/>
+              </a:spcAft>
+              <a:defRPr sz="1600">
+                <a:solidFill>
+                  <a:srgbClr val="333333"/>
+                </a:solidFill>
+              </a:defRPr>
+            </a:pPr>
+            <a:r>
+              <a:t>    if choice == "quit":</a:t>
+            </a:r>
+          </a:p>
+          <a:p>
+            <a:pPr>
+              <a:spcAft>
+                <a:spcPts val="600"/>
+              </a:spcAft>
+              <a:defRPr sz="1600">
+                <a:solidFill>
+                  <a:srgbClr val="333333"/>
+                </a:solidFill>
+              </a:defRPr>
+            </a:pPr>
+            <a:r>
+              <a:t>        break</a:t>
+            </a:r>
+          </a:p>
+          <a:p>
+            <a:pPr>
+              <a:spcAft>
+                <a:spcPts val="600"/>
+              </a:spcAft>
+              <a:defRPr sz="1600">
+                <a:solidFill>
+                  <a:srgbClr val="333333"/>
+                </a:solidFill>
+              </a:defRPr>
+            </a:pPr>
+            <a:r>
+              <a:t>    process(choice)</a:t>
+            </a:r>
+          </a:p>
+          <a:p>
+            <a:pPr>
+              <a:spcAft>
+                <a:spcPts val="600"/>
+              </a:spcAft>
+              <a:defRPr b="1" sz="2000">
+                <a:solidFill>
+                  <a:srgbClr val="333333"/>
+                </a:solidFill>
+              </a:defRPr>
+            </a:pPr>
+            <a:r>
+              <a:t>Pattern 6: Validation</a:t>
+            </a:r>
+          </a:p>
+          <a:p>
+            <a:pPr>
+              <a:spcAft>
+                <a:spcPts val="600"/>
+              </a:spcAft>
+              <a:defRPr b="1" sz="2000">
+                <a:solidFill>
+                  <a:srgbClr val="333333"/>
+                </a:solidFill>
+              </a:defRPr>
+            </a:pPr>
+            <a:r>
+              <a:t>while True:</a:t>
+            </a:r>
+          </a:p>
+          <a:p>
+            <a:pPr>
+              <a:spcAft>
+                <a:spcPts val="600"/>
+              </a:spcAft>
+              <a:defRPr sz="1600">
+                <a:solidFill>
+                  <a:srgbClr val="333333"/>
+                </a:solidFill>
+              </a:defRPr>
+            </a:pPr>
+            <a:r>
+              <a:t>    value = input("Enter: ")</a:t>
+            </a:r>
+          </a:p>
+          <a:p>
+            <a:pPr>
+              <a:spcAft>
+                <a:spcPts val="600"/>
+              </a:spcAft>
+              <a:defRPr sz="1600">
+                <a:solidFill>
+                  <a:srgbClr val="333333"/>
+                </a:solidFill>
+              </a:defRPr>
+            </a:pPr>
+            <a:r>
+              <a:t>    if is_valid(value):</a:t>
+            </a:r>
+          </a:p>
+          <a:p>
+            <a:pPr>
+              <a:spcAft>
+                <a:spcPts val="600"/>
+              </a:spcAft>
+              <a:defRPr sz="1600">
+                <a:solidFill>
+                  <a:srgbClr val="333333"/>
+                </a:solidFill>
+              </a:defRPr>
+            </a:pPr>
+            <a:r>
+              <a:t>        break</a:t>
+            </a:r>
+          </a:p>
+          <a:p>
+            <a:pPr>
+              <a:spcAft>
+                <a:spcPts val="600"/>
+              </a:spcAft>
+              <a:defRPr sz="1600">
+                <a:solidFill>
+                  <a:srgbClr val="333333"/>
+                </a:solidFill>
+              </a:defRPr>
+            </a:pPr>
+            <a:r>
+              <a:t>    print("Invalid, try again")</a:t>
             </a:r>
           </a:p>
         </p:txBody>
@@ -4142,8 +4936,8 @@
         </p:nvSpPr>
         <p:spPr>
           <a:xfrm>
-            <a:off x="457200" y="365760"/>
-            <a:ext cx="10972800" cy="731520"/>
+            <a:off x="457200" y="320040"/>
+            <a:ext cx="10972800" cy="640080"/>
           </a:xfrm>
           <a:prstGeom prst="rect">
             <a:avLst/>
@@ -4157,71 +4951,28 @@
           <a:lstStyle/>
           <a:p>
             <a:pPr>
-              <a:defRPr sz="4000" b="1">
+              <a:defRPr sz="3600" b="1">
                 <a:solidFill>
                   <a:srgbClr val="003366"/>
                 </a:solidFill>
               </a:defRPr>
             </a:pPr>
             <a:r>
-              <a:t>Which Loop Should I Use? 🤔</a:t>
-            </a:r>
-          </a:p>
-        </p:txBody>
-      </p:sp>
-      <p:sp>
-        <p:nvSpPr>
-          <p:cNvPr id="5" name="Rectangle 4"/>
-          <p:cNvSpPr/>
+              <a:t>Loop Best Practices</a:t>
+            </a:r>
+          </a:p>
+        </p:txBody>
+      </p:sp>
+      <p:sp>
+        <p:nvSpPr>
+          <p:cNvPr id="5" name="TextBox 4"/>
+          <p:cNvSpPr txBox="1"/>
           <p:nvPr/>
         </p:nvSpPr>
         <p:spPr>
           <a:xfrm>
-            <a:off x="457200" y="1005840"/>
-            <a:ext cx="1828800" cy="45720"/>
-          </a:xfrm>
-          <a:prstGeom prst="rect">
-            <a:avLst/>
-          </a:prstGeom>
-          <a:solidFill>
-            <a:srgbClr val="0066CC"/>
-          </a:solidFill>
-          <a:ln>
-            <a:noFill/>
-          </a:ln>
-        </p:spPr>
-        <p:style>
-          <a:lnRef idx="1">
-            <a:schemeClr val="accent1"/>
-          </a:lnRef>
-          <a:fillRef idx="3">
-            <a:schemeClr val="accent1"/>
-          </a:fillRef>
-          <a:effectRef idx="2">
-            <a:schemeClr val="accent1"/>
-          </a:effectRef>
-          <a:fontRef idx="minor">
-            <a:schemeClr val="lt1"/>
-          </a:fontRef>
-        </p:style>
-        <p:txBody>
-          <a:bodyPr rtlCol="0" anchor="ctr"/>
-          <a:lstStyle/>
-          <a:p>
-            <a:pPr algn="ctr"/>
-          </a:p>
-        </p:txBody>
-      </p:sp>
-      <p:sp>
-        <p:nvSpPr>
-          <p:cNvPr id="6" name="TextBox 5"/>
-          <p:cNvSpPr txBox="1"/>
-          <p:nvPr/>
-        </p:nvSpPr>
-        <p:spPr>
-          <a:xfrm>
-            <a:off x="640080" y="1371600"/>
-            <a:ext cx="10789920" cy="4572000"/>
+            <a:off x="640080" y="1188720"/>
+            <a:ext cx="10789920" cy="5303520"/>
           </a:xfrm>
           <a:prstGeom prst="rect">
             <a:avLst/>
@@ -4236,136 +4987,346 @@
           <a:p>
             <a:pPr>
               <a:spcAft>
-                <a:spcPts val="800"/>
-              </a:spcAft>
-              <a:defRPr sz="2000" b="1">
-                <a:solidFill>
-                  <a:srgbClr val="333333"/>
-                </a:solidFill>
-              </a:defRPr>
-            </a:pPr>
-            <a:r>
-              <a:t>Use FOR loops when:</a:t>
-            </a:r>
-          </a:p>
-          <a:p>
-            <a:pPr>
-              <a:spcAft>
-                <a:spcPts val="800"/>
-              </a:spcAft>
-              <a:defRPr sz="2000" b="1">
-                <a:solidFill>
-                  <a:srgbClr val="333333"/>
-                </a:solidFill>
-              </a:defRPr>
-            </a:pPr>
-            <a:r>
-              <a:t>Use WHILE loops when:</a:t>
-            </a:r>
-          </a:p>
-          <a:p>
-            <a:pPr>
-              <a:spcAft>
-                <a:spcPts val="800"/>
-              </a:spcAft>
-              <a:defRPr sz="2000" b="1">
-                <a:solidFill>
-                  <a:srgbClr val="333333"/>
-                </a:solidFill>
-              </a:defRPr>
-            </a:pPr>
-            <a:r>
-              <a:t>Pro Tip:If you can use a for loop, it's usually better (clearer and safer)!</a:t>
+                <a:spcPts val="600"/>
+              </a:spcAft>
+              <a:defRPr b="1" sz="2000">
+                <a:solidFill>
+                  <a:srgbClr val="333333"/>
+                </a:solidFill>
+              </a:defRPr>
+            </a:pPr>
+            <a:r>
+              <a:t>Good Practices:</a:t>
+            </a:r>
+          </a:p>
+          <a:p>
+            <a:pPr>
+              <a:spcAft>
+                <a:spcPts val="600"/>
+              </a:spcAft>
+              <a:defRPr b="1" sz="2000">
+                <a:solidFill>
+                  <a:srgbClr val="333333"/>
+                </a:solidFill>
+              </a:defRPr>
+            </a:pPr>
+            <a:r>
+              <a:t>1. Use Meaningful Variable Names:</a:t>
+            </a:r>
+          </a:p>
+          <a:p>
+            <a:pPr>
+              <a:spcAft>
+                <a:spcPts val="600"/>
+              </a:spcAft>
+              <a:defRPr b="1" sz="2000">
+                <a:solidFill>
+                  <a:srgbClr val="333333"/>
+                </a:solidFill>
+              </a:defRPr>
+            </a:pPr>
+            <a:r>
+              <a:t>for student in students:  # Good</a:t>
+            </a:r>
+          </a:p>
+          <a:p>
+            <a:pPr>
+              <a:spcAft>
+                <a:spcPts val="600"/>
+              </a:spcAft>
+              <a:defRPr b="1" sz="2000">
+                <a:solidFill>
+                  <a:srgbClr val="333333"/>
+                </a:solidFill>
+              </a:defRPr>
+            </a:pPr>
+            <a:r>
+              <a:t>for i in students:        # Less clear</a:t>
+            </a:r>
+          </a:p>
+          <a:p>
+            <a:pPr>
+              <a:spcAft>
+                <a:spcPts val="600"/>
+              </a:spcAft>
+              <a:defRPr b="1" sz="2000">
+                <a:solidFill>
+                  <a:srgbClr val="333333"/>
+                </a:solidFill>
+              </a:defRPr>
+            </a:pPr>
+            <a:r>
+              <a:t>2. Keep Loop Body Short:</a:t>
             </a:r>
           </a:p>
           <a:p>
             <a:pPr lvl="1">
               <a:spcAft>
-                <a:spcPts val="800"/>
-              </a:spcAft>
-              <a:defRPr sz="1800">
-                <a:solidFill>
-                  <a:srgbClr val="333333"/>
-                </a:solidFill>
-              </a:defRPr>
-            </a:pPr>
-            <a:r>
-              <a:t>• ✅ You know how many times to repeat</a:t>
+                <a:spcPts val="400"/>
+              </a:spcAft>
+              <a:defRPr sz="1600">
+                <a:solidFill>
+                  <a:srgbClr val="333333"/>
+                </a:solidFill>
+              </a:defRPr>
+            </a:pPr>
+            <a:r>
+              <a:t>• Extract complex logic to functions</a:t>
             </a:r>
           </a:p>
           <a:p>
             <a:pPr lvl="1">
               <a:spcAft>
-                <a:spcPts val="800"/>
-              </a:spcAft>
-              <a:defRPr sz="1800">
-                <a:solidFill>
-                  <a:srgbClr val="333333"/>
-                </a:solidFill>
-              </a:defRPr>
-            </a:pPr>
-            <a:r>
-              <a:t>• ✅ You're iterating through a sequence (string, list, range)</a:t>
+                <a:spcPts val="400"/>
+              </a:spcAft>
+              <a:defRPr sz="1600">
+                <a:solidFill>
+                  <a:srgbClr val="333333"/>
+                </a:solidFill>
+              </a:defRPr>
+            </a:pPr>
+            <a:r>
+              <a:t>• Max 10-15 lines per loop</a:t>
+            </a:r>
+          </a:p>
+          <a:p>
+            <a:pPr>
+              <a:spcAft>
+                <a:spcPts val="600"/>
+              </a:spcAft>
+              <a:defRPr b="1" sz="2000">
+                <a:solidFill>
+                  <a:srgbClr val="333333"/>
+                </a:solidFill>
+              </a:defRPr>
+            </a:pPr>
+            <a:r>
+              <a:t>3. Avoid Modifying Loop Variable:</a:t>
+            </a:r>
+          </a:p>
+          <a:p>
+            <a:pPr>
+              <a:spcAft>
+                <a:spcPts val="600"/>
+              </a:spcAft>
+              <a:defRPr b="1" sz="2000">
+                <a:solidFill>
+                  <a:srgbClr val="333333"/>
+                </a:solidFill>
+              </a:defRPr>
+            </a:pPr>
+            <a:r>
+              <a:t>for i in range(10):</a:t>
+            </a:r>
+          </a:p>
+          <a:p>
+            <a:pPr>
+              <a:spcAft>
+                <a:spcPts val="600"/>
+              </a:spcAft>
+              <a:defRPr sz="1600">
+                <a:solidFill>
+                  <a:srgbClr val="333333"/>
+                </a:solidFill>
+              </a:defRPr>
+            </a:pPr>
+            <a:r>
+              <a:t>    i += 1  # Don't do this!</a:t>
+            </a:r>
+          </a:p>
+          <a:p>
+            <a:pPr>
+              <a:spcAft>
+                <a:spcPts val="600"/>
+              </a:spcAft>
+              <a:defRPr b="1" sz="2000">
+                <a:solidFill>
+                  <a:srgbClr val="333333"/>
+                </a:solidFill>
+              </a:defRPr>
+            </a:pPr>
+            <a:r>
+              <a:t>4. Comment Complex Loops:</a:t>
+            </a:r>
+          </a:p>
+          <a:p>
+            <a:pPr>
+              <a:spcAft>
+                <a:spcPts val="600"/>
+              </a:spcAft>
+              <a:defRPr sz="1600">
+                <a:solidFill>
+                  <a:srgbClr val="333333"/>
+                </a:solidFill>
+              </a:defRPr>
+            </a:pPr>
+            <a:r>
+              <a:t># Calculate running average</a:t>
+            </a:r>
+          </a:p>
+          <a:p>
+            <a:pPr>
+              <a:spcAft>
+                <a:spcPts val="600"/>
+              </a:spcAft>
+              <a:defRPr b="1" sz="2000">
+                <a:solidFill>
+                  <a:srgbClr val="333333"/>
+                </a:solidFill>
+              </a:defRPr>
+            </a:pPr>
+            <a:r>
+              <a:t>for value in data:</a:t>
+            </a:r>
+          </a:p>
+          <a:p>
+            <a:pPr>
+              <a:spcAft>
+                <a:spcPts val="600"/>
+              </a:spcAft>
+              <a:defRPr sz="1600">
+                <a:solidFill>
+                  <a:srgbClr val="333333"/>
+                </a:solidFill>
+              </a:defRPr>
+            </a:pPr>
+            <a:r>
+              <a:t>    ...</a:t>
+            </a:r>
+          </a:p>
+          <a:p>
+            <a:pPr>
+              <a:spcAft>
+                <a:spcPts val="600"/>
+              </a:spcAft>
+              <a:defRPr b="1" sz="2000">
+                <a:solidFill>
+                  <a:srgbClr val="333333"/>
+                </a:solidFill>
+              </a:defRPr>
+            </a:pPr>
+            <a:r>
+              <a:t>5. Initialize Before Loop:</a:t>
+            </a:r>
+          </a:p>
+          <a:p>
+            <a:pPr>
+              <a:spcAft>
+                <a:spcPts val="600"/>
+              </a:spcAft>
+              <a:defRPr sz="1600">
+                <a:solidFill>
+                  <a:srgbClr val="333333"/>
+                </a:solidFill>
+              </a:defRPr>
+            </a:pPr>
+            <a:r>
+              <a:t>total = 0  # Initialize</a:t>
+            </a:r>
+          </a:p>
+          <a:p>
+            <a:pPr>
+              <a:spcAft>
+                <a:spcPts val="600"/>
+              </a:spcAft>
+              <a:defRPr b="1" sz="2000">
+                <a:solidFill>
+                  <a:srgbClr val="333333"/>
+                </a:solidFill>
+              </a:defRPr>
+            </a:pPr>
+            <a:r>
+              <a:t>for num in numbers:</a:t>
+            </a:r>
+          </a:p>
+          <a:p>
+            <a:pPr>
+              <a:spcAft>
+                <a:spcPts val="600"/>
+              </a:spcAft>
+              <a:defRPr sz="1600">
+                <a:solidFill>
+                  <a:srgbClr val="333333"/>
+                </a:solidFill>
+              </a:defRPr>
+            </a:pPr>
+            <a:r>
+              <a:t>    total += num</a:t>
+            </a:r>
+          </a:p>
+          <a:p>
+            <a:pPr>
+              <a:spcAft>
+                <a:spcPts val="600"/>
+              </a:spcAft>
+              <a:defRPr b="1" sz="2000">
+                <a:solidFill>
+                  <a:srgbClr val="333333"/>
+                </a:solidFill>
+              </a:defRPr>
+            </a:pPr>
+            <a:r>
+              <a:t>Common Mistakes to Avoid:</a:t>
             </a:r>
           </a:p>
           <a:p>
             <a:pPr lvl="1">
               <a:spcAft>
-                <a:spcPts val="800"/>
-              </a:spcAft>
-              <a:defRPr sz="1800">
-                <a:solidFill>
-                  <a:srgbClr val="333333"/>
-                </a:solidFill>
-              </a:defRPr>
-            </a:pPr>
-            <a:r>
-              <a:t>• ✅ You need a counter variable</a:t>
+                <a:spcPts val="400"/>
+              </a:spcAft>
+              <a:defRPr sz="1600">
+                <a:solidFill>
+                  <a:srgbClr val="333333"/>
+                </a:solidFill>
+              </a:defRPr>
+            </a:pPr>
+            <a:r>
+              <a:t>• Infinite loops</a:t>
             </a:r>
           </a:p>
           <a:p>
             <a:pPr lvl="1">
               <a:spcAft>
-                <a:spcPts val="800"/>
-              </a:spcAft>
-              <a:defRPr sz="1800">
-                <a:solidFill>
-                  <a:srgbClr val="333333"/>
-                </a:solidFill>
-              </a:defRPr>
-            </a:pPr>
-            <a:r>
-              <a:t>• ✅ You don't know how many times to repeat</a:t>
+                <a:spcPts val="400"/>
+              </a:spcAft>
+              <a:defRPr sz="1600">
+                <a:solidFill>
+                  <a:srgbClr val="333333"/>
+                </a:solidFill>
+              </a:defRPr>
+            </a:pPr>
+            <a:r>
+              <a:t>• Off-by-one errors</a:t>
             </a:r>
           </a:p>
           <a:p>
             <a:pPr lvl="1">
               <a:spcAft>
-                <a:spcPts val="800"/>
-              </a:spcAft>
-              <a:defRPr sz="1800">
-                <a:solidFill>
-                  <a:srgbClr val="333333"/>
-                </a:solidFill>
-              </a:defRPr>
-            </a:pPr>
-            <a:r>
-              <a:t>• ✅ You're waiting for a condition to change</a:t>
+                <a:spcPts val="400"/>
+              </a:spcAft>
+              <a:defRPr sz="1600">
+                <a:solidFill>
+                  <a:srgbClr val="333333"/>
+                </a:solidFill>
+              </a:defRPr>
+            </a:pPr>
+            <a:r>
+              <a:t>• Forgetting to update counter</a:t>
             </a:r>
           </a:p>
           <a:p>
             <a:pPr lvl="1">
               <a:spcAft>
-                <a:spcPts val="800"/>
-              </a:spcAft>
-              <a:defRPr sz="1800">
-                <a:solidFill>
-                  <a:srgbClr val="333333"/>
-                </a:solidFill>
-              </a:defRPr>
-            </a:pPr>
-            <a:r>
-              <a:t>• ✅ You're validating user input</a:t>
+                <a:spcPts val="400"/>
+              </a:spcAft>
+              <a:defRPr sz="1600">
+                <a:solidFill>
+                  <a:srgbClr val="333333"/>
+                </a:solidFill>
+              </a:defRPr>
+            </a:pPr>
+            <a:r>
+              <a:t>• Modifying collection while iterating</a:t>
             </a:r>
           </a:p>
         </p:txBody>
@@ -4378,7 +5339,7 @@
 </p:sld>
 </file>
 
-<file path=ppt/slides/slide14.xml><?xml version="1.0" encoding="utf-8"?>
+<file path=ppt/slides/slide2.xml><?xml version="1.0" encoding="utf-8"?>
 <p:sld xmlns:a="http://schemas.openxmlformats.org/drawingml/2006/main" xmlns:p="http://schemas.openxmlformats.org/presentationml/2006/main" xmlns:r="http://schemas.openxmlformats.org/officeDocument/2006/relationships">
   <p:cSld>
     <p:spTree>
@@ -4482,8 +5443,8 @@
         </p:nvSpPr>
         <p:spPr>
           <a:xfrm>
-            <a:off x="457200" y="365760"/>
-            <a:ext cx="10972800" cy="731520"/>
+            <a:off x="457200" y="320040"/>
+            <a:ext cx="10972800" cy="640080"/>
           </a:xfrm>
           <a:prstGeom prst="rect">
             <a:avLst/>
@@ -4497,71 +5458,28 @@
           <a:lstStyle/>
           <a:p>
             <a:pPr>
-              <a:defRPr sz="4000" b="1">
+              <a:defRPr sz="3600" b="1">
                 <a:solidFill>
                   <a:srgbClr val="003366"/>
                 </a:solidFill>
               </a:defRPr>
             </a:pPr>
             <a:r>
-              <a:t>Common Mistakes to Avoid ⚠️</a:t>
-            </a:r>
-          </a:p>
-        </p:txBody>
-      </p:sp>
-      <p:sp>
-        <p:nvSpPr>
-          <p:cNvPr id="5" name="Rectangle 4"/>
-          <p:cNvSpPr/>
+              <a:t>Why Do We Need Loops?</a:t>
+            </a:r>
+          </a:p>
+        </p:txBody>
+      </p:sp>
+      <p:sp>
+        <p:nvSpPr>
+          <p:cNvPr id="5" name="TextBox 4"/>
+          <p:cNvSpPr txBox="1"/>
           <p:nvPr/>
         </p:nvSpPr>
         <p:spPr>
           <a:xfrm>
-            <a:off x="457200" y="1005840"/>
-            <a:ext cx="1828800" cy="45720"/>
-          </a:xfrm>
-          <a:prstGeom prst="rect">
-            <a:avLst/>
-          </a:prstGeom>
-          <a:solidFill>
-            <a:srgbClr val="0066CC"/>
-          </a:solidFill>
-          <a:ln>
-            <a:noFill/>
-          </a:ln>
-        </p:spPr>
-        <p:style>
-          <a:lnRef idx="1">
-            <a:schemeClr val="accent1"/>
-          </a:lnRef>
-          <a:fillRef idx="3">
-            <a:schemeClr val="accent1"/>
-          </a:fillRef>
-          <a:effectRef idx="2">
-            <a:schemeClr val="accent1"/>
-          </a:effectRef>
-          <a:fontRef idx="minor">
-            <a:schemeClr val="lt1"/>
-          </a:fontRef>
-        </p:style>
-        <p:txBody>
-          <a:bodyPr rtlCol="0" anchor="ctr"/>
-          <a:lstStyle/>
-          <a:p>
-            <a:pPr algn="ctr"/>
-          </a:p>
-        </p:txBody>
-      </p:sp>
-      <p:sp>
-        <p:nvSpPr>
-          <p:cNvPr id="6" name="TextBox 5"/>
-          <p:cNvSpPr txBox="1"/>
-          <p:nvPr/>
-        </p:nvSpPr>
-        <p:spPr>
-          <a:xfrm>
-            <a:off x="640080" y="1371600"/>
-            <a:ext cx="10789920" cy="4572000"/>
+            <a:off x="640080" y="1188720"/>
+            <a:ext cx="10789920" cy="5303520"/>
           </a:xfrm>
           <a:prstGeom prst="rect">
             <a:avLst/>
@@ -4576,46 +5494,256 @@
           <a:p>
             <a:pPr>
               <a:spcAft>
-                <a:spcPts val="800"/>
-              </a:spcAft>
-              <a:defRPr sz="2000" b="1">
-                <a:solidFill>
-                  <a:srgbClr val="333333"/>
-                </a:solidFill>
-              </a:defRPr>
-            </a:pPr>
-            <a:r>
-              <a:t>Infinite Loop (Never Stops!)</a:t>
-            </a:r>
-          </a:p>
-          <a:p>
-            <a:pPr>
-              <a:spcAft>
-                <a:spcPts val="800"/>
-              </a:spcAft>
-              <a:defRPr sz="2000" b="1">
-                <a:solidFill>
-                  <a:srgbClr val="333333"/>
-                </a:solidFill>
-              </a:defRPr>
-            </a:pPr>
-            <a:r>
-              <a:t>Off-by-One Error</a:t>
-            </a:r>
-          </a:p>
-          <a:p>
-            <a:pPr>
-              <a:spcAft>
-                <a:spcPts val="800"/>
-              </a:spcAft>
-              <a:defRPr sz="2000" b="1">
-                <a:solidFill>
-                  <a:srgbClr val="333333"/>
-                </a:solidFill>
-              </a:defRPr>
-            </a:pPr>
-            <a:r>
-              <a:t>Forgetting Indentation</a:t>
+                <a:spcPts val="600"/>
+              </a:spcAft>
+              <a:defRPr b="1" sz="2000">
+                <a:solidFill>
+                  <a:srgbClr val="333333"/>
+                </a:solidFill>
+              </a:defRPr>
+            </a:pPr>
+            <a:r>
+              <a:t>Problem: Repetitive Code</a:t>
+            </a:r>
+          </a:p>
+          <a:p>
+            <a:pPr>
+              <a:spcAft>
+                <a:spcPts val="600"/>
+              </a:spcAft>
+              <a:defRPr sz="1600">
+                <a:solidFill>
+                  <a:srgbClr val="333333"/>
+                </a:solidFill>
+              </a:defRPr>
+            </a:pPr>
+            <a:r>
+              <a:t>print("Hello")</a:t>
+            </a:r>
+          </a:p>
+          <a:p>
+            <a:pPr>
+              <a:spcAft>
+                <a:spcPts val="600"/>
+              </a:spcAft>
+              <a:defRPr sz="1600">
+                <a:solidFill>
+                  <a:srgbClr val="333333"/>
+                </a:solidFill>
+              </a:defRPr>
+            </a:pPr>
+            <a:r>
+              <a:t>print("Hello")</a:t>
+            </a:r>
+          </a:p>
+          <a:p>
+            <a:pPr>
+              <a:spcAft>
+                <a:spcPts val="600"/>
+              </a:spcAft>
+              <a:defRPr sz="1600">
+                <a:solidFill>
+                  <a:srgbClr val="333333"/>
+                </a:solidFill>
+              </a:defRPr>
+            </a:pPr>
+            <a:r>
+              <a:t>print("Hello")</a:t>
+            </a:r>
+          </a:p>
+          <a:p>
+            <a:pPr>
+              <a:spcAft>
+                <a:spcPts val="600"/>
+              </a:spcAft>
+              <a:defRPr sz="1600">
+                <a:solidFill>
+                  <a:srgbClr val="333333"/>
+                </a:solidFill>
+              </a:defRPr>
+            </a:pPr>
+            <a:r>
+              <a:t>print("Hello")</a:t>
+            </a:r>
+          </a:p>
+          <a:p>
+            <a:pPr>
+              <a:spcAft>
+                <a:spcPts val="600"/>
+              </a:spcAft>
+              <a:defRPr sz="1600">
+                <a:solidFill>
+                  <a:srgbClr val="333333"/>
+                </a:solidFill>
+              </a:defRPr>
+            </a:pPr>
+            <a:r>
+              <a:t>print("Hello")</a:t>
+            </a:r>
+          </a:p>
+          <a:p>
+            <a:pPr>
+              <a:spcAft>
+                <a:spcPts val="600"/>
+              </a:spcAft>
+              <a:defRPr b="1" sz="2000">
+                <a:solidFill>
+                  <a:srgbClr val="333333"/>
+                </a:solidFill>
+              </a:defRPr>
+            </a:pPr>
+            <a:r>
+              <a:t>Solution: Use a Loop</a:t>
+            </a:r>
+          </a:p>
+          <a:p>
+            <a:pPr>
+              <a:spcAft>
+                <a:spcPts val="600"/>
+              </a:spcAft>
+              <a:defRPr b="1" sz="2000">
+                <a:solidFill>
+                  <a:srgbClr val="333333"/>
+                </a:solidFill>
+              </a:defRPr>
+            </a:pPr>
+            <a:r>
+              <a:t>for i in range(5):</a:t>
+            </a:r>
+          </a:p>
+          <a:p>
+            <a:pPr>
+              <a:spcAft>
+                <a:spcPts val="600"/>
+              </a:spcAft>
+              <a:defRPr sz="1600">
+                <a:solidFill>
+                  <a:srgbClr val="333333"/>
+                </a:solidFill>
+              </a:defRPr>
+            </a:pPr>
+            <a:r>
+              <a:t>    print("Hello")</a:t>
+            </a:r>
+          </a:p>
+          <a:p>
+            <a:pPr>
+              <a:spcAft>
+                <a:spcPts val="600"/>
+              </a:spcAft>
+              <a:defRPr b="1" sz="2000">
+                <a:solidFill>
+                  <a:srgbClr val="333333"/>
+                </a:solidFill>
+              </a:defRPr>
+            </a:pPr>
+            <a:r>
+              <a:t>Benefits of Loops:</a:t>
+            </a:r>
+          </a:p>
+          <a:p>
+            <a:pPr lvl="1">
+              <a:spcAft>
+                <a:spcPts val="400"/>
+              </a:spcAft>
+              <a:defRPr sz="1600">
+                <a:solidFill>
+                  <a:srgbClr val="333333"/>
+                </a:solidFill>
+              </a:defRPr>
+            </a:pPr>
+            <a:r>
+              <a:t>• Reduce code duplication</a:t>
+            </a:r>
+          </a:p>
+          <a:p>
+            <a:pPr lvl="1">
+              <a:spcAft>
+                <a:spcPts val="400"/>
+              </a:spcAft>
+              <a:defRPr sz="1600">
+                <a:solidFill>
+                  <a:srgbClr val="333333"/>
+                </a:solidFill>
+              </a:defRPr>
+            </a:pPr>
+            <a:r>
+              <a:t>• Easy to change repetition count</a:t>
+            </a:r>
+          </a:p>
+          <a:p>
+            <a:pPr lvl="1">
+              <a:spcAft>
+                <a:spcPts val="400"/>
+              </a:spcAft>
+              <a:defRPr sz="1600">
+                <a:solidFill>
+                  <a:srgbClr val="333333"/>
+                </a:solidFill>
+              </a:defRPr>
+            </a:pPr>
+            <a:r>
+              <a:t>• Handle variable-length tasks</a:t>
+            </a:r>
+          </a:p>
+          <a:p>
+            <a:pPr lvl="1">
+              <a:spcAft>
+                <a:spcPts val="400"/>
+              </a:spcAft>
+              <a:defRPr sz="1600">
+                <a:solidFill>
+                  <a:srgbClr val="333333"/>
+                </a:solidFill>
+              </a:defRPr>
+            </a:pPr>
+            <a:r>
+              <a:t>• More efficient and maintainable</a:t>
+            </a:r>
+          </a:p>
+          <a:p>
+            <a:pPr>
+              <a:spcAft>
+                <a:spcPts val="600"/>
+              </a:spcAft>
+              <a:defRPr b="1" sz="2000">
+                <a:solidFill>
+                  <a:srgbClr val="333333"/>
+                </a:solidFill>
+              </a:defRPr>
+            </a:pPr>
+            <a:r>
+              <a:t>Two Types of Loops in Python:</a:t>
+            </a:r>
+          </a:p>
+          <a:p>
+            <a:pPr>
+              <a:spcAft>
+                <a:spcPts val="600"/>
+              </a:spcAft>
+              <a:defRPr b="1" sz="2000">
+                <a:solidFill>
+                  <a:srgbClr val="333333"/>
+                </a:solidFill>
+              </a:defRPr>
+            </a:pPr>
+            <a:r>
+              <a:t>1. while loops: Repeat while condition is True</a:t>
+            </a:r>
+          </a:p>
+          <a:p>
+            <a:pPr>
+              <a:spcAft>
+                <a:spcPts val="600"/>
+              </a:spcAft>
+              <a:defRPr b="1" sz="2000">
+                <a:solidFill>
+                  <a:srgbClr val="333333"/>
+                </a:solidFill>
+              </a:defRPr>
+            </a:pPr>
+            <a:r>
+              <a:t>2. for loops: Repeat for each item in sequence</a:t>
             </a:r>
           </a:p>
         </p:txBody>
@@ -4628,173 +5756,7 @@
 </p:sld>
 </file>
 
-<file path=ppt/slides/slide15.xml><?xml version="1.0" encoding="utf-8"?>
-<p:sld xmlns:a="http://schemas.openxmlformats.org/drawingml/2006/main" xmlns:p="http://schemas.openxmlformats.org/presentationml/2006/main" xmlns:r="http://schemas.openxmlformats.org/officeDocument/2006/relationships">
-  <p:cSld>
-    <p:spTree>
-      <p:nvGrpSpPr>
-        <p:cNvPr id="1" name=""/>
-        <p:cNvGrpSpPr/>
-        <p:nvPr/>
-      </p:nvGrpSpPr>
-      <p:grpSpPr/>
-      <p:sp>
-        <p:nvSpPr>
-          <p:cNvPr id="2" name="Rectangle 1"/>
-          <p:cNvSpPr/>
-          <p:nvPr/>
-        </p:nvSpPr>
-        <p:spPr>
-          <a:xfrm>
-            <a:off x="0" y="0"/>
-            <a:ext cx="12191695" cy="6858000"/>
-          </a:xfrm>
-          <a:prstGeom prst="rect">
-            <a:avLst/>
-          </a:prstGeom>
-          <a:solidFill>
-            <a:srgbClr val="F0F8FF"/>
-          </a:solidFill>
-          <a:ln>
-            <a:noFill/>
-          </a:ln>
-        </p:spPr>
-        <p:style>
-          <a:lnRef idx="1">
-            <a:schemeClr val="accent1"/>
-          </a:lnRef>
-          <a:fillRef idx="3">
-            <a:schemeClr val="accent1"/>
-          </a:fillRef>
-          <a:effectRef idx="2">
-            <a:schemeClr val="accent1"/>
-          </a:effectRef>
-          <a:fontRef idx="minor">
-            <a:schemeClr val="lt1"/>
-          </a:fontRef>
-        </p:style>
-        <p:txBody>
-          <a:bodyPr rtlCol="0" anchor="ctr"/>
-          <a:lstStyle/>
-          <a:p>
-            <a:pPr algn="ctr"/>
-          </a:p>
-        </p:txBody>
-      </p:sp>
-      <p:sp>
-        <p:nvSpPr>
-          <p:cNvPr id="3" name="TextBox 2"/>
-          <p:cNvSpPr txBox="1"/>
-          <p:nvPr/>
-        </p:nvSpPr>
-        <p:spPr>
-          <a:xfrm>
-            <a:off x="914400" y="1828800"/>
-            <a:ext cx="10360152" cy="1371600"/>
-          </a:xfrm>
-          <a:prstGeom prst="rect">
-            <a:avLst/>
-          </a:prstGeom>
-          <a:noFill/>
-        </p:spPr>
-        <p:txBody>
-          <a:bodyPr wrap="none">
-            <a:spAutoFit/>
-          </a:bodyPr>
-          <a:lstStyle/>
-          <a:p>
-            <a:pPr algn="ctr">
-              <a:defRPr sz="5400" b="1">
-                <a:solidFill>
-                  <a:srgbClr val="003366"/>
-                </a:solidFill>
-              </a:defRPr>
-            </a:pPr>
-            <a:r>
-              <a:t>Time to Loop!</a:t>
-            </a:r>
-          </a:p>
-        </p:txBody>
-      </p:sp>
-      <p:sp>
-        <p:nvSpPr>
-          <p:cNvPr id="4" name="TextBox 3"/>
-          <p:cNvSpPr txBox="1"/>
-          <p:nvPr/>
-        </p:nvSpPr>
-        <p:spPr>
-          <a:xfrm>
-            <a:off x="914400" y="3657600"/>
-            <a:ext cx="10360152" cy="548640"/>
-          </a:xfrm>
-          <a:prstGeom prst="rect">
-            <a:avLst/>
-          </a:prstGeom>
-          <a:noFill/>
-        </p:spPr>
-        <p:txBody>
-          <a:bodyPr wrap="none">
-            <a:spAutoFit/>
-          </a:bodyPr>
-          <a:lstStyle/>
-          <a:p>
-            <a:pPr algn="ctr">
-              <a:defRPr sz="2800">
-                <a:solidFill>
-                  <a:srgbClr val="4682B4"/>
-                </a:solidFill>
-              </a:defRPr>
-            </a:pPr>
-            <a:r>
-              <a:t>Open the practice notebook and master repetition</a:t>
-            </a:r>
-          </a:p>
-        </p:txBody>
-      </p:sp>
-      <p:sp>
-        <p:nvSpPr>
-          <p:cNvPr id="5" name="TextBox 4"/>
-          <p:cNvSpPr txBox="1"/>
-          <p:nvPr/>
-        </p:nvSpPr>
-        <p:spPr>
-          <a:xfrm>
-            <a:off x="914400" y="4297680"/>
-            <a:ext cx="10360152" cy="548640"/>
-          </a:xfrm>
-          <a:prstGeom prst="rect">
-            <a:avLst/>
-          </a:prstGeom>
-          <a:noFill/>
-        </p:spPr>
-        <p:txBody>
-          <a:bodyPr wrap="none">
-            <a:spAutoFit/>
-          </a:bodyPr>
-          <a:lstStyle/>
-          <a:p>
-            <a:pPr algn="ctr">
-              <a:defRPr sz="2800">
-                <a:solidFill>
-                  <a:srgbClr val="4682B4"/>
-                </a:solidFill>
-              </a:defRPr>
-            </a:pPr>
-            <a:r>
-              <a:t>Your programs are about to become much more powerful!</a:t>
-            </a:r>
-          </a:p>
-        </p:txBody>
-      </p:sp>
-    </p:spTree>
-  </p:cSld>
-  <p:clrMapOvr>
-    <a:masterClrMapping/>
-  </p:clrMapOvr>
-</p:sld>
-</file>
-
-<file path=ppt/slides/slide2.xml><?xml version="1.0" encoding="utf-8"?>
+<file path=ppt/slides/slide3.xml><?xml version="1.0" encoding="utf-8"?>
 <p:sld xmlns:a="http://schemas.openxmlformats.org/drawingml/2006/main" xmlns:p="http://schemas.openxmlformats.org/presentationml/2006/main" xmlns:r="http://schemas.openxmlformats.org/officeDocument/2006/relationships">
   <p:cSld>
     <p:spTree>
@@ -4898,8 +5860,8 @@
         </p:nvSpPr>
         <p:spPr>
           <a:xfrm>
-            <a:off x="457200" y="365760"/>
-            <a:ext cx="10972800" cy="731520"/>
+            <a:off x="457200" y="320040"/>
+            <a:ext cx="10972800" cy="640080"/>
           </a:xfrm>
           <a:prstGeom prst="rect">
             <a:avLst/>
@@ -4913,71 +5875,28 @@
           <a:lstStyle/>
           <a:p>
             <a:pPr>
-              <a:defRPr sz="4000" b="1">
+              <a:defRPr sz="3600" b="1">
                 <a:solidFill>
                   <a:srgbClr val="003366"/>
                 </a:solidFill>
               </a:defRPr>
             </a:pPr>
             <a:r>
-              <a:t>Why Do We Need Loops? 🔄</a:t>
-            </a:r>
-          </a:p>
-        </p:txBody>
-      </p:sp>
-      <p:sp>
-        <p:nvSpPr>
-          <p:cNvPr id="5" name="Rectangle 4"/>
-          <p:cNvSpPr/>
+              <a:t>While Loops: Basic Structure</a:t>
+            </a:r>
+          </a:p>
+        </p:txBody>
+      </p:sp>
+      <p:sp>
+        <p:nvSpPr>
+          <p:cNvPr id="5" name="TextBox 4"/>
+          <p:cNvSpPr txBox="1"/>
           <p:nvPr/>
         </p:nvSpPr>
         <p:spPr>
           <a:xfrm>
-            <a:off x="457200" y="1005840"/>
-            <a:ext cx="1828800" cy="45720"/>
-          </a:xfrm>
-          <a:prstGeom prst="rect">
-            <a:avLst/>
-          </a:prstGeom>
-          <a:solidFill>
-            <a:srgbClr val="0066CC"/>
-          </a:solidFill>
-          <a:ln>
-            <a:noFill/>
-          </a:ln>
-        </p:spPr>
-        <p:style>
-          <a:lnRef idx="1">
-            <a:schemeClr val="accent1"/>
-          </a:lnRef>
-          <a:fillRef idx="3">
-            <a:schemeClr val="accent1"/>
-          </a:fillRef>
-          <a:effectRef idx="2">
-            <a:schemeClr val="accent1"/>
-          </a:effectRef>
-          <a:fontRef idx="minor">
-            <a:schemeClr val="lt1"/>
-          </a:fontRef>
-        </p:style>
-        <p:txBody>
-          <a:bodyPr rtlCol="0" anchor="ctr"/>
-          <a:lstStyle/>
-          <a:p>
-            <a:pPr algn="ctr"/>
-          </a:p>
-        </p:txBody>
-      </p:sp>
-      <p:sp>
-        <p:nvSpPr>
-          <p:cNvPr id="6" name="TextBox 5"/>
-          <p:cNvSpPr txBox="1"/>
-          <p:nvPr/>
-        </p:nvSpPr>
-        <p:spPr>
-          <a:xfrm>
-            <a:off x="640080" y="1371600"/>
-            <a:ext cx="10789920" cy="4572000"/>
+            <a:off x="640080" y="1188720"/>
+            <a:ext cx="10789920" cy="5303520"/>
           </a:xfrm>
           <a:prstGeom prst="rect">
             <a:avLst/>
@@ -4992,61 +5911,331 @@
           <a:p>
             <a:pPr>
               <a:spcAft>
-                <a:spcPts val="800"/>
-              </a:spcAft>
-              <a:defRPr sz="2000" b="1">
-                <a:solidFill>
-                  <a:srgbClr val="333333"/>
-                </a:solidFill>
-              </a:defRPr>
-            </a:pPr>
-            <a:r>
-              <a:t>Imagine you need to print "Hello" 100 times...</a:t>
-            </a:r>
-          </a:p>
-          <a:p>
-            <a:pPr>
-              <a:spcAft>
-                <a:spcPts val="800"/>
-              </a:spcAft>
-              <a:defRPr sz="2000" b="1">
-                <a:solidFill>
-                  <a:srgbClr val="333333"/>
-                </a:solidFill>
-              </a:defRPr>
-            </a:pPr>
-            <a:r>
-              <a:t>Without Loops (Bad!) ❌</a:t>
-            </a:r>
-          </a:p>
-          <a:p>
-            <a:pPr>
-              <a:spcAft>
-                <a:spcPts val="800"/>
-              </a:spcAft>
-              <a:defRPr sz="2000" b="1">
-                <a:solidFill>
-                  <a:srgbClr val="333333"/>
-                </a:solidFill>
-              </a:defRPr>
-            </a:pPr>
-            <a:r>
-              <a:t>With Loops (Good!) ✅</a:t>
-            </a:r>
-          </a:p>
-          <a:p>
-            <a:pPr>
-              <a:spcAft>
-                <a:spcPts val="800"/>
-              </a:spcAft>
-              <a:defRPr sz="2000" b="1">
-                <a:solidFill>
-                  <a:srgbClr val="333333"/>
-                </a:solidFill>
-              </a:defRPr>
-            </a:pPr>
-            <a:r>
-              <a:t>Loops let us repeat code efficiently!</a:t>
+                <a:spcPts val="600"/>
+              </a:spcAft>
+              <a:defRPr b="1" sz="2000">
+                <a:solidFill>
+                  <a:srgbClr val="333333"/>
+                </a:solidFill>
+              </a:defRPr>
+            </a:pPr>
+            <a:r>
+              <a:t>While Loop Syntax:</a:t>
+            </a:r>
+          </a:p>
+          <a:p>
+            <a:pPr>
+              <a:spcAft>
+                <a:spcPts val="600"/>
+              </a:spcAft>
+              <a:defRPr b="1" sz="2000">
+                <a:solidFill>
+                  <a:srgbClr val="333333"/>
+                </a:solidFill>
+              </a:defRPr>
+            </a:pPr>
+            <a:r>
+              <a:t>while condition:</a:t>
+            </a:r>
+          </a:p>
+          <a:p>
+            <a:pPr>
+              <a:spcAft>
+                <a:spcPts val="600"/>
+              </a:spcAft>
+              <a:defRPr sz="1600">
+                <a:solidFill>
+                  <a:srgbClr val="333333"/>
+                </a:solidFill>
+              </a:defRPr>
+            </a:pPr>
+            <a:r>
+              <a:t>    # code to repeat</a:t>
+            </a:r>
+          </a:p>
+          <a:p>
+            <a:pPr>
+              <a:spcAft>
+                <a:spcPts val="600"/>
+              </a:spcAft>
+              <a:defRPr sz="1600">
+                <a:solidFill>
+                  <a:srgbClr val="333333"/>
+                </a:solidFill>
+              </a:defRPr>
+            </a:pPr>
+            <a:r>
+              <a:t>    # update condition eventually</a:t>
+            </a:r>
+          </a:p>
+          <a:p>
+            <a:pPr>
+              <a:spcAft>
+                <a:spcPts val="600"/>
+              </a:spcAft>
+              <a:defRPr b="1" sz="2000">
+                <a:solidFill>
+                  <a:srgbClr val="333333"/>
+                </a:solidFill>
+              </a:defRPr>
+            </a:pPr>
+            <a:r>
+              <a:t>Simple Example:</a:t>
+            </a:r>
+          </a:p>
+          <a:p>
+            <a:pPr>
+              <a:spcAft>
+                <a:spcPts val="600"/>
+              </a:spcAft>
+              <a:defRPr sz="1600">
+                <a:solidFill>
+                  <a:srgbClr val="333333"/>
+                </a:solidFill>
+              </a:defRPr>
+            </a:pPr>
+            <a:r>
+              <a:t>count = 0</a:t>
+            </a:r>
+          </a:p>
+          <a:p>
+            <a:pPr>
+              <a:spcAft>
+                <a:spcPts val="600"/>
+              </a:spcAft>
+              <a:defRPr b="1" sz="2000">
+                <a:solidFill>
+                  <a:srgbClr val="333333"/>
+                </a:solidFill>
+              </a:defRPr>
+            </a:pPr>
+            <a:r>
+              <a:t>while count &lt; 5:</a:t>
+            </a:r>
+          </a:p>
+          <a:p>
+            <a:pPr>
+              <a:spcAft>
+                <a:spcPts val="600"/>
+              </a:spcAft>
+              <a:defRPr sz="1600">
+                <a:solidFill>
+                  <a:srgbClr val="333333"/>
+                </a:solidFill>
+              </a:defRPr>
+            </a:pPr>
+            <a:r>
+              <a:t>    print(count)</a:t>
+            </a:r>
+          </a:p>
+          <a:p>
+            <a:pPr>
+              <a:spcAft>
+                <a:spcPts val="600"/>
+              </a:spcAft>
+              <a:defRPr sz="1600">
+                <a:solidFill>
+                  <a:srgbClr val="333333"/>
+                </a:solidFill>
+              </a:defRPr>
+            </a:pPr>
+            <a:r>
+              <a:t>    count += 1</a:t>
+            </a:r>
+          </a:p>
+          <a:p>
+            <a:pPr>
+              <a:spcAft>
+                <a:spcPts val="600"/>
+              </a:spcAft>
+              <a:defRPr b="1" sz="2000">
+                <a:solidFill>
+                  <a:srgbClr val="333333"/>
+                </a:solidFill>
+              </a:defRPr>
+            </a:pPr>
+            <a:r>
+              <a:t>How It Works:</a:t>
+            </a:r>
+          </a:p>
+          <a:p>
+            <a:pPr>
+              <a:spcAft>
+                <a:spcPts val="600"/>
+              </a:spcAft>
+              <a:defRPr sz="1600">
+                <a:solidFill>
+                  <a:srgbClr val="333333"/>
+                </a:solidFill>
+              </a:defRPr>
+            </a:pPr>
+            <a:r>
+              <a:t>1. Check if condition is True</a:t>
+            </a:r>
+          </a:p>
+          <a:p>
+            <a:pPr>
+              <a:spcAft>
+                <a:spcPts val="600"/>
+              </a:spcAft>
+              <a:defRPr sz="1600">
+                <a:solidFill>
+                  <a:srgbClr val="333333"/>
+                </a:solidFill>
+              </a:defRPr>
+            </a:pPr>
+            <a:r>
+              <a:t>2. If True, execute loop body</a:t>
+            </a:r>
+          </a:p>
+          <a:p>
+            <a:pPr>
+              <a:spcAft>
+                <a:spcPts val="600"/>
+              </a:spcAft>
+              <a:defRPr sz="1600">
+                <a:solidFill>
+                  <a:srgbClr val="333333"/>
+                </a:solidFill>
+              </a:defRPr>
+            </a:pPr>
+            <a:r>
+              <a:t>3. Repeat from step 1</a:t>
+            </a:r>
+          </a:p>
+          <a:p>
+            <a:pPr>
+              <a:spcAft>
+                <a:spcPts val="600"/>
+              </a:spcAft>
+              <a:defRPr sz="1600">
+                <a:solidFill>
+                  <a:srgbClr val="333333"/>
+                </a:solidFill>
+              </a:defRPr>
+            </a:pPr>
+            <a:r>
+              <a:t>4. If False, exit loop</a:t>
+            </a:r>
+          </a:p>
+          <a:p>
+            <a:pPr>
+              <a:spcAft>
+                <a:spcPts val="600"/>
+              </a:spcAft>
+              <a:defRPr b="1" sz="2000">
+                <a:solidFill>
+                  <a:srgbClr val="333333"/>
+                </a:solidFill>
+              </a:defRPr>
+            </a:pPr>
+            <a:r>
+              <a:t>Critical: Update Loop Variable</a:t>
+            </a:r>
+          </a:p>
+          <a:p>
+            <a:pPr lvl="1">
+              <a:spcAft>
+                <a:spcPts val="400"/>
+              </a:spcAft>
+              <a:defRPr sz="1600">
+                <a:solidFill>
+                  <a:srgbClr val="333333"/>
+                </a:solidFill>
+              </a:defRPr>
+            </a:pPr>
+            <a:r>
+              <a:t>• Must change the condition eventually</a:t>
+            </a:r>
+          </a:p>
+          <a:p>
+            <a:pPr lvl="1">
+              <a:spcAft>
+                <a:spcPts val="400"/>
+              </a:spcAft>
+              <a:defRPr sz="1600">
+                <a:solidFill>
+                  <a:srgbClr val="333333"/>
+                </a:solidFill>
+              </a:defRPr>
+            </a:pPr>
+            <a:r>
+              <a:t>• Otherwise: infinite loop</a:t>
+            </a:r>
+          </a:p>
+          <a:p>
+            <a:pPr>
+              <a:spcAft>
+                <a:spcPts val="600"/>
+              </a:spcAft>
+              <a:defRPr b="1" sz="2000">
+                <a:solidFill>
+                  <a:srgbClr val="333333"/>
+                </a:solidFill>
+              </a:defRPr>
+            </a:pPr>
+            <a:r>
+              <a:t>Common Pattern:</a:t>
+            </a:r>
+          </a:p>
+          <a:p>
+            <a:pPr>
+              <a:spcAft>
+                <a:spcPts val="600"/>
+              </a:spcAft>
+              <a:defRPr sz="1600">
+                <a:solidFill>
+                  <a:srgbClr val="333333"/>
+                </a:solidFill>
+              </a:defRPr>
+            </a:pPr>
+            <a:r>
+              <a:t>counter = start_value</a:t>
+            </a:r>
+          </a:p>
+          <a:p>
+            <a:pPr>
+              <a:spcAft>
+                <a:spcPts val="600"/>
+              </a:spcAft>
+              <a:defRPr b="1" sz="2000">
+                <a:solidFill>
+                  <a:srgbClr val="333333"/>
+                </a:solidFill>
+              </a:defRPr>
+            </a:pPr>
+            <a:r>
+              <a:t>while counter &lt; end_value:</a:t>
+            </a:r>
+          </a:p>
+          <a:p>
+            <a:pPr>
+              <a:spcAft>
+                <a:spcPts val="600"/>
+              </a:spcAft>
+              <a:defRPr sz="1600">
+                <a:solidFill>
+                  <a:srgbClr val="333333"/>
+                </a:solidFill>
+              </a:defRPr>
+            </a:pPr>
+            <a:r>
+              <a:t>    # do something</a:t>
+            </a:r>
+          </a:p>
+          <a:p>
+            <a:pPr>
+              <a:spcAft>
+                <a:spcPts val="600"/>
+              </a:spcAft>
+              <a:defRPr sz="1600">
+                <a:solidFill>
+                  <a:srgbClr val="333333"/>
+                </a:solidFill>
+              </a:defRPr>
+            </a:pPr>
+            <a:r>
+              <a:t>    counter += 1</a:t>
             </a:r>
           </a:p>
         </p:txBody>
@@ -5059,7 +6248,7 @@
 </p:sld>
 </file>
 
-<file path=ppt/slides/slide3.xml><?xml version="1.0" encoding="utf-8"?>
+<file path=ppt/slides/slide4.xml><?xml version="1.0" encoding="utf-8"?>
 <p:sld xmlns:a="http://schemas.openxmlformats.org/drawingml/2006/main" xmlns:p="http://schemas.openxmlformats.org/presentationml/2006/main" xmlns:r="http://schemas.openxmlformats.org/officeDocument/2006/relationships">
   <p:cSld>
     <p:spTree>
@@ -5163,8 +6352,8 @@
         </p:nvSpPr>
         <p:spPr>
           <a:xfrm>
-            <a:off x="457200" y="365760"/>
-            <a:ext cx="10972800" cy="731520"/>
+            <a:off x="457200" y="320040"/>
+            <a:ext cx="10972800" cy="640080"/>
           </a:xfrm>
           <a:prstGeom prst="rect">
             <a:avLst/>
@@ -5178,71 +6367,28 @@
           <a:lstStyle/>
           <a:p>
             <a:pPr>
-              <a:defRPr sz="4000" b="1">
+              <a:defRPr sz="3600" b="1">
                 <a:solidFill>
                   <a:srgbClr val="003366"/>
                 </a:solidFill>
               </a:defRPr>
             </a:pPr>
             <a:r>
-              <a:t>While Loops: Repeat While True ⏳</a:t>
-            </a:r>
-          </a:p>
-        </p:txBody>
-      </p:sp>
-      <p:sp>
-        <p:nvSpPr>
-          <p:cNvPr id="5" name="Rectangle 4"/>
-          <p:cNvSpPr/>
+              <a:t>While Loop Examples</a:t>
+            </a:r>
+          </a:p>
+        </p:txBody>
+      </p:sp>
+      <p:sp>
+        <p:nvSpPr>
+          <p:cNvPr id="5" name="TextBox 4"/>
+          <p:cNvSpPr txBox="1"/>
           <p:nvPr/>
         </p:nvSpPr>
         <p:spPr>
           <a:xfrm>
-            <a:off x="457200" y="1005840"/>
-            <a:ext cx="1828800" cy="45720"/>
-          </a:xfrm>
-          <a:prstGeom prst="rect">
-            <a:avLst/>
-          </a:prstGeom>
-          <a:solidFill>
-            <a:srgbClr val="0066CC"/>
-          </a:solidFill>
-          <a:ln>
-            <a:noFill/>
-          </a:ln>
-        </p:spPr>
-        <p:style>
-          <a:lnRef idx="1">
-            <a:schemeClr val="accent1"/>
-          </a:lnRef>
-          <a:fillRef idx="3">
-            <a:schemeClr val="accent1"/>
-          </a:fillRef>
-          <a:effectRef idx="2">
-            <a:schemeClr val="accent1"/>
-          </a:effectRef>
-          <a:fontRef idx="minor">
-            <a:schemeClr val="lt1"/>
-          </a:fontRef>
-        </p:style>
-        <p:txBody>
-          <a:bodyPr rtlCol="0" anchor="ctr"/>
-          <a:lstStyle/>
-          <a:p>
-            <a:pPr algn="ctr"/>
-          </a:p>
-        </p:txBody>
-      </p:sp>
-      <p:sp>
-        <p:nvSpPr>
-          <p:cNvPr id="6" name="TextBox 5"/>
-          <p:cNvSpPr txBox="1"/>
-          <p:nvPr/>
-        </p:nvSpPr>
-        <p:spPr>
-          <a:xfrm>
-            <a:off x="640080" y="1371600"/>
-            <a:ext cx="10789920" cy="4572000"/>
+            <a:off x="640080" y="1188720"/>
+            <a:ext cx="10789920" cy="5303520"/>
           </a:xfrm>
           <a:prstGeom prst="rect">
             <a:avLst/>
@@ -5257,76 +6403,361 @@
           <a:p>
             <a:pPr>
               <a:spcAft>
-                <a:spcPts val="800"/>
-              </a:spcAft>
-              <a:defRPr sz="2000" b="1">
-                <a:solidFill>
-                  <a:srgbClr val="333333"/>
-                </a:solidFill>
-              </a:defRPr>
-            </a:pPr>
-            <a:r>
-              <a:t>A while loop repeats as long as a condition is True</a:t>
-            </a:r>
-          </a:p>
-          <a:p>
-            <a:pPr>
-              <a:spcAft>
-                <a:spcPts val="800"/>
-              </a:spcAft>
-              <a:defRPr sz="2000" b="1">
-                <a:solidFill>
-                  <a:srgbClr val="333333"/>
-                </a:solidFill>
-              </a:defRPr>
-            </a:pPr>
-            <a:r>
-              <a:t>Syntax:</a:t>
-            </a:r>
-          </a:p>
-          <a:p>
-            <a:pPr>
-              <a:spcAft>
-                <a:spcPts val="800"/>
-              </a:spcAft>
-              <a:defRPr sz="2000" b="1">
-                <a:solidFill>
-                  <a:srgbClr val="333333"/>
-                </a:solidFill>
-              </a:defRPr>
-            </a:pPr>
-            <a:r>
-              <a:t>Example: Count to 5</a:t>
-            </a:r>
-          </a:p>
-          <a:p>
-            <a:pPr>
-              <a:spcAft>
-                <a:spcPts val="800"/>
-              </a:spcAft>
-              <a:defRPr sz="2000" b="1">
-                <a:solidFill>
-                  <a:srgbClr val="333333"/>
-                </a:solidFill>
-              </a:defRPr>
-            </a:pPr>
-            <a:r>
-              <a:t>Output:</a:t>
-            </a:r>
-          </a:p>
-          <a:p>
-            <a:pPr>
-              <a:spcAft>
-                <a:spcPts val="800"/>
-              </a:spcAft>
-              <a:defRPr sz="2000" b="1">
-                <a:solidFill>
-                  <a:srgbClr val="333333"/>
-                </a:solidFill>
-              </a:defRPr>
-            </a:pPr>
-            <a:r>
-              <a:t>Important:Don't forget to update the counter, or the loop runs forever!</a:t>
+                <a:spcPts val="600"/>
+              </a:spcAft>
+              <a:defRPr b="1" sz="2000">
+                <a:solidFill>
+                  <a:srgbClr val="333333"/>
+                </a:solidFill>
+              </a:defRPr>
+            </a:pPr>
+            <a:r>
+              <a:t>Countdown:</a:t>
+            </a:r>
+          </a:p>
+          <a:p>
+            <a:pPr>
+              <a:spcAft>
+                <a:spcPts val="600"/>
+              </a:spcAft>
+              <a:defRPr sz="1600">
+                <a:solidFill>
+                  <a:srgbClr val="333333"/>
+                </a:solidFill>
+              </a:defRPr>
+            </a:pPr>
+            <a:r>
+              <a:t>count = 5</a:t>
+            </a:r>
+          </a:p>
+          <a:p>
+            <a:pPr>
+              <a:spcAft>
+                <a:spcPts val="600"/>
+              </a:spcAft>
+              <a:defRPr b="1" sz="2000">
+                <a:solidFill>
+                  <a:srgbClr val="333333"/>
+                </a:solidFill>
+              </a:defRPr>
+            </a:pPr>
+            <a:r>
+              <a:t>while count &gt; 0:</a:t>
+            </a:r>
+          </a:p>
+          <a:p>
+            <a:pPr>
+              <a:spcAft>
+                <a:spcPts val="600"/>
+              </a:spcAft>
+              <a:defRPr sz="1600">
+                <a:solidFill>
+                  <a:srgbClr val="333333"/>
+                </a:solidFill>
+              </a:defRPr>
+            </a:pPr>
+            <a:r>
+              <a:t>    print(count)</a:t>
+            </a:r>
+          </a:p>
+          <a:p>
+            <a:pPr>
+              <a:spcAft>
+                <a:spcPts val="600"/>
+              </a:spcAft>
+              <a:defRPr sz="1600">
+                <a:solidFill>
+                  <a:srgbClr val="333333"/>
+                </a:solidFill>
+              </a:defRPr>
+            </a:pPr>
+            <a:r>
+              <a:t>    count -= 1</a:t>
+            </a:r>
+          </a:p>
+          <a:p>
+            <a:pPr>
+              <a:spcAft>
+                <a:spcPts val="600"/>
+              </a:spcAft>
+              <a:defRPr sz="1600">
+                <a:solidFill>
+                  <a:srgbClr val="333333"/>
+                </a:solidFill>
+              </a:defRPr>
+            </a:pPr>
+            <a:r>
+              <a:t>print("Blast off!")</a:t>
+            </a:r>
+          </a:p>
+          <a:p>
+            <a:pPr>
+              <a:spcAft>
+                <a:spcPts val="600"/>
+              </a:spcAft>
+              <a:defRPr b="1" sz="2000">
+                <a:solidFill>
+                  <a:srgbClr val="333333"/>
+                </a:solidFill>
+              </a:defRPr>
+            </a:pPr>
+            <a:r>
+              <a:t>Sum Numbers:</a:t>
+            </a:r>
+          </a:p>
+          <a:p>
+            <a:pPr>
+              <a:spcAft>
+                <a:spcPts val="600"/>
+              </a:spcAft>
+              <a:defRPr sz="1600">
+                <a:solidFill>
+                  <a:srgbClr val="333333"/>
+                </a:solidFill>
+              </a:defRPr>
+            </a:pPr>
+            <a:r>
+              <a:t>total = 0</a:t>
+            </a:r>
+          </a:p>
+          <a:p>
+            <a:pPr>
+              <a:spcAft>
+                <a:spcPts val="600"/>
+              </a:spcAft>
+              <a:defRPr sz="1600">
+                <a:solidFill>
+                  <a:srgbClr val="333333"/>
+                </a:solidFill>
+              </a:defRPr>
+            </a:pPr>
+            <a:r>
+              <a:t>num = 1</a:t>
+            </a:r>
+          </a:p>
+          <a:p>
+            <a:pPr>
+              <a:spcAft>
+                <a:spcPts val="600"/>
+              </a:spcAft>
+              <a:defRPr b="1" sz="2000">
+                <a:solidFill>
+                  <a:srgbClr val="333333"/>
+                </a:solidFill>
+              </a:defRPr>
+            </a:pPr>
+            <a:r>
+              <a:t>while num &lt;= 10:</a:t>
+            </a:r>
+          </a:p>
+          <a:p>
+            <a:pPr>
+              <a:spcAft>
+                <a:spcPts val="600"/>
+              </a:spcAft>
+              <a:defRPr sz="1600">
+                <a:solidFill>
+                  <a:srgbClr val="333333"/>
+                </a:solidFill>
+              </a:defRPr>
+            </a:pPr>
+            <a:r>
+              <a:t>    total += num</a:t>
+            </a:r>
+          </a:p>
+          <a:p>
+            <a:pPr>
+              <a:spcAft>
+                <a:spcPts val="600"/>
+              </a:spcAft>
+              <a:defRPr sz="1600">
+                <a:solidFill>
+                  <a:srgbClr val="333333"/>
+                </a:solidFill>
+              </a:defRPr>
+            </a:pPr>
+            <a:r>
+              <a:t>    num += 1</a:t>
+            </a:r>
+          </a:p>
+          <a:p>
+            <a:pPr>
+              <a:spcAft>
+                <a:spcPts val="600"/>
+              </a:spcAft>
+              <a:defRPr b="1" sz="2000">
+                <a:solidFill>
+                  <a:srgbClr val="333333"/>
+                </a:solidFill>
+              </a:defRPr>
+            </a:pPr>
+            <a:r>
+              <a:t>print(f"Sum: {total}")</a:t>
+            </a:r>
+          </a:p>
+          <a:p>
+            <a:pPr>
+              <a:spcAft>
+                <a:spcPts val="600"/>
+              </a:spcAft>
+              <a:defRPr b="1" sz="2000">
+                <a:solidFill>
+                  <a:srgbClr val="333333"/>
+                </a:solidFill>
+              </a:defRPr>
+            </a:pPr>
+            <a:r>
+              <a:t>User Input Loop:</a:t>
+            </a:r>
+          </a:p>
+          <a:p>
+            <a:pPr>
+              <a:spcAft>
+                <a:spcPts val="600"/>
+              </a:spcAft>
+              <a:defRPr sz="1600">
+                <a:solidFill>
+                  <a:srgbClr val="333333"/>
+                </a:solidFill>
+              </a:defRPr>
+            </a:pPr>
+            <a:r>
+              <a:t>password = ""</a:t>
+            </a:r>
+          </a:p>
+          <a:p>
+            <a:pPr>
+              <a:spcAft>
+                <a:spcPts val="600"/>
+              </a:spcAft>
+              <a:defRPr b="1" sz="2000">
+                <a:solidFill>
+                  <a:srgbClr val="333333"/>
+                </a:solidFill>
+              </a:defRPr>
+            </a:pPr>
+            <a:r>
+              <a:t>while password != "secret":</a:t>
+            </a:r>
+          </a:p>
+          <a:p>
+            <a:pPr>
+              <a:spcAft>
+                <a:spcPts val="600"/>
+              </a:spcAft>
+              <a:defRPr sz="1600">
+                <a:solidFill>
+                  <a:srgbClr val="333333"/>
+                </a:solidFill>
+              </a:defRPr>
+            </a:pPr>
+            <a:r>
+              <a:t>    password = input("Enter password: ")</a:t>
+            </a:r>
+          </a:p>
+          <a:p>
+            <a:pPr>
+              <a:spcAft>
+                <a:spcPts val="600"/>
+              </a:spcAft>
+              <a:defRPr sz="1600">
+                <a:solidFill>
+                  <a:srgbClr val="333333"/>
+                </a:solidFill>
+              </a:defRPr>
+            </a:pPr>
+            <a:r>
+              <a:t>print("Access granted")</a:t>
+            </a:r>
+          </a:p>
+          <a:p>
+            <a:pPr>
+              <a:spcAft>
+                <a:spcPts val="600"/>
+              </a:spcAft>
+              <a:defRPr b="1" sz="2000">
+                <a:solidFill>
+                  <a:srgbClr val="333333"/>
+                </a:solidFill>
+              </a:defRPr>
+            </a:pPr>
+            <a:r>
+              <a:t>Validation Loop:</a:t>
+            </a:r>
+          </a:p>
+          <a:p>
+            <a:pPr>
+              <a:spcAft>
+                <a:spcPts val="600"/>
+              </a:spcAft>
+              <a:defRPr sz="1600">
+                <a:solidFill>
+                  <a:srgbClr val="333333"/>
+                </a:solidFill>
+              </a:defRPr>
+            </a:pPr>
+            <a:r>
+              <a:t>age = -1</a:t>
+            </a:r>
+          </a:p>
+          <a:p>
+            <a:pPr>
+              <a:spcAft>
+                <a:spcPts val="600"/>
+              </a:spcAft>
+              <a:defRPr b="1" sz="2000">
+                <a:solidFill>
+                  <a:srgbClr val="333333"/>
+                </a:solidFill>
+              </a:defRPr>
+            </a:pPr>
+            <a:r>
+              <a:t>while age &lt; 0:</a:t>
+            </a:r>
+          </a:p>
+          <a:p>
+            <a:pPr>
+              <a:spcAft>
+                <a:spcPts val="600"/>
+              </a:spcAft>
+              <a:defRPr sz="1600">
+                <a:solidFill>
+                  <a:srgbClr val="333333"/>
+                </a:solidFill>
+              </a:defRPr>
+            </a:pPr>
+            <a:r>
+              <a:t>    age = int(input("Enter age: "))</a:t>
+            </a:r>
+          </a:p>
+          <a:p>
+            <a:pPr>
+              <a:spcAft>
+                <a:spcPts val="600"/>
+              </a:spcAft>
+              <a:defRPr sz="1600">
+                <a:solidFill>
+                  <a:srgbClr val="333333"/>
+                </a:solidFill>
+              </a:defRPr>
+            </a:pPr>
+            <a:r>
+              <a:t>    if age &lt; 0:</a:t>
+            </a:r>
+          </a:p>
+          <a:p>
+            <a:pPr>
+              <a:spcAft>
+                <a:spcPts val="600"/>
+              </a:spcAft>
+              <a:defRPr sz="1600">
+                <a:solidFill>
+                  <a:srgbClr val="333333"/>
+                </a:solidFill>
+              </a:defRPr>
+            </a:pPr>
+            <a:r>
+              <a:t>        print("Age must be positive")</a:t>
             </a:r>
           </a:p>
         </p:txBody>
@@ -5339,7 +6770,7 @@
 </p:sld>
 </file>
 
-<file path=ppt/slides/slide4.xml><?xml version="1.0" encoding="utf-8"?>
+<file path=ppt/slides/slide5.xml><?xml version="1.0" encoding="utf-8"?>
 <p:sld xmlns:a="http://schemas.openxmlformats.org/drawingml/2006/main" xmlns:p="http://schemas.openxmlformats.org/presentationml/2006/main" xmlns:r="http://schemas.openxmlformats.org/officeDocument/2006/relationships">
   <p:cSld>
     <p:spTree>
@@ -5443,8 +6874,8 @@
         </p:nvSpPr>
         <p:spPr>
           <a:xfrm>
-            <a:off x="457200" y="365760"/>
-            <a:ext cx="10972800" cy="731520"/>
+            <a:off x="457200" y="320040"/>
+            <a:ext cx="10972800" cy="640080"/>
           </a:xfrm>
           <a:prstGeom prst="rect">
             <a:avLst/>
@@ -5458,71 +6889,28 @@
           <a:lstStyle/>
           <a:p>
             <a:pPr>
-              <a:defRPr sz="4000" b="1">
+              <a:defRPr sz="3600" b="1">
                 <a:solidFill>
                   <a:srgbClr val="003366"/>
                 </a:solidFill>
               </a:defRPr>
             </a:pPr>
             <a:r>
-              <a:t>While Loops with Counters 🔢</a:t>
-            </a:r>
-          </a:p>
-        </p:txBody>
-      </p:sp>
-      <p:sp>
-        <p:nvSpPr>
-          <p:cNvPr id="5" name="Rectangle 4"/>
-          <p:cNvSpPr/>
+              <a:t>For Loops: Basic Structure</a:t>
+            </a:r>
+          </a:p>
+        </p:txBody>
+      </p:sp>
+      <p:sp>
+        <p:nvSpPr>
+          <p:cNvPr id="5" name="TextBox 4"/>
+          <p:cNvSpPr txBox="1"/>
           <p:nvPr/>
         </p:nvSpPr>
         <p:spPr>
           <a:xfrm>
-            <a:off x="457200" y="1005840"/>
-            <a:ext cx="1828800" cy="45720"/>
-          </a:xfrm>
-          <a:prstGeom prst="rect">
-            <a:avLst/>
-          </a:prstGeom>
-          <a:solidFill>
-            <a:srgbClr val="0066CC"/>
-          </a:solidFill>
-          <a:ln>
-            <a:noFill/>
-          </a:ln>
-        </p:spPr>
-        <p:style>
-          <a:lnRef idx="1">
-            <a:schemeClr val="accent1"/>
-          </a:lnRef>
-          <a:fillRef idx="3">
-            <a:schemeClr val="accent1"/>
-          </a:fillRef>
-          <a:effectRef idx="2">
-            <a:schemeClr val="accent1"/>
-          </a:effectRef>
-          <a:fontRef idx="minor">
-            <a:schemeClr val="lt1"/>
-          </a:fontRef>
-        </p:style>
-        <p:txBody>
-          <a:bodyPr rtlCol="0" anchor="ctr"/>
-          <a:lstStyle/>
-          <a:p>
-            <a:pPr algn="ctr"/>
-          </a:p>
-        </p:txBody>
-      </p:sp>
-      <p:sp>
-        <p:nvSpPr>
-          <p:cNvPr id="6" name="TextBox 5"/>
-          <p:cNvSpPr txBox="1"/>
-          <p:nvPr/>
-        </p:nvSpPr>
-        <p:spPr>
-          <a:xfrm>
-            <a:off x="640080" y="1371600"/>
-            <a:ext cx="10789920" cy="4572000"/>
+            <a:off x="640080" y="1188720"/>
+            <a:ext cx="10789920" cy="5303520"/>
           </a:xfrm>
           <a:prstGeom prst="rect">
             <a:avLst/>
@@ -5537,46 +6925,346 @@
           <a:p>
             <a:pPr>
               <a:spcAft>
-                <a:spcPts val="800"/>
-              </a:spcAft>
-              <a:defRPr sz="2000" b="1">
-                <a:solidFill>
-                  <a:srgbClr val="333333"/>
-                </a:solidFill>
-              </a:defRPr>
-            </a:pPr>
-            <a:r>
-              <a:t>Pattern for Counter Loops:</a:t>
-            </a:r>
-          </a:p>
-          <a:p>
-            <a:pPr>
-              <a:spcAft>
-                <a:spcPts val="800"/>
-              </a:spcAft>
-              <a:defRPr sz="2000" b="1">
-                <a:solidFill>
-                  <a:srgbClr val="333333"/>
-                </a:solidFill>
-              </a:defRPr>
-            </a:pPr>
-            <a:r>
-              <a:t>Countdown</a:t>
-            </a:r>
-          </a:p>
-          <a:p>
-            <a:pPr>
-              <a:spcAft>
-                <a:spcPts val="800"/>
-              </a:spcAft>
-              <a:defRPr sz="2000" b="1">
-                <a:solidFill>
-                  <a:srgbClr val="333333"/>
-                </a:solidFill>
-              </a:defRPr>
-            </a:pPr>
-            <a:r>
-              <a:t>Sum Numbers</a:t>
+                <a:spcPts val="600"/>
+              </a:spcAft>
+              <a:defRPr b="1" sz="2000">
+                <a:solidFill>
+                  <a:srgbClr val="333333"/>
+                </a:solidFill>
+              </a:defRPr>
+            </a:pPr>
+            <a:r>
+              <a:t>For Loop Syntax:</a:t>
+            </a:r>
+          </a:p>
+          <a:p>
+            <a:pPr>
+              <a:spcAft>
+                <a:spcPts val="600"/>
+              </a:spcAft>
+              <a:defRPr b="1" sz="2000">
+                <a:solidFill>
+                  <a:srgbClr val="333333"/>
+                </a:solidFill>
+              </a:defRPr>
+            </a:pPr>
+            <a:r>
+              <a:t>for variable in sequence:</a:t>
+            </a:r>
+          </a:p>
+          <a:p>
+            <a:pPr>
+              <a:spcAft>
+                <a:spcPts val="600"/>
+              </a:spcAft>
+              <a:defRPr sz="1600">
+                <a:solidFill>
+                  <a:srgbClr val="333333"/>
+                </a:solidFill>
+              </a:defRPr>
+            </a:pPr>
+            <a:r>
+              <a:t>    # code to repeat</a:t>
+            </a:r>
+          </a:p>
+          <a:p>
+            <a:pPr>
+              <a:spcAft>
+                <a:spcPts val="600"/>
+              </a:spcAft>
+              <a:defRPr b="1" sz="2000">
+                <a:solidFill>
+                  <a:srgbClr val="333333"/>
+                </a:solidFill>
+              </a:defRPr>
+            </a:pPr>
+            <a:r>
+              <a:t>Example with range():</a:t>
+            </a:r>
+          </a:p>
+          <a:p>
+            <a:pPr>
+              <a:spcAft>
+                <a:spcPts val="600"/>
+              </a:spcAft>
+              <a:defRPr b="1" sz="2000">
+                <a:solidFill>
+                  <a:srgbClr val="333333"/>
+                </a:solidFill>
+              </a:defRPr>
+            </a:pPr>
+            <a:r>
+              <a:t>for i in range(5):</a:t>
+            </a:r>
+          </a:p>
+          <a:p>
+            <a:pPr>
+              <a:spcAft>
+                <a:spcPts val="600"/>
+              </a:spcAft>
+              <a:defRPr sz="1600">
+                <a:solidFill>
+                  <a:srgbClr val="333333"/>
+                </a:solidFill>
+              </a:defRPr>
+            </a:pPr>
+            <a:r>
+              <a:t>    print(i)</a:t>
+            </a:r>
+          </a:p>
+          <a:p>
+            <a:pPr>
+              <a:spcAft>
+                <a:spcPts val="600"/>
+              </a:spcAft>
+              <a:defRPr b="1" sz="2000">
+                <a:solidFill>
+                  <a:srgbClr val="333333"/>
+                </a:solidFill>
+              </a:defRPr>
+            </a:pPr>
+            <a:r>
+              <a:t># Prints: 0, 1, 2, 3, 4</a:t>
+            </a:r>
+          </a:p>
+          <a:p>
+            <a:pPr>
+              <a:spcAft>
+                <a:spcPts val="600"/>
+              </a:spcAft>
+              <a:defRPr b="1" sz="2000">
+                <a:solidFill>
+                  <a:srgbClr val="333333"/>
+                </a:solidFill>
+              </a:defRPr>
+            </a:pPr>
+            <a:r>
+              <a:t>Example with String:</a:t>
+            </a:r>
+          </a:p>
+          <a:p>
+            <a:pPr>
+              <a:spcAft>
+                <a:spcPts val="600"/>
+              </a:spcAft>
+              <a:defRPr b="1" sz="2000">
+                <a:solidFill>
+                  <a:srgbClr val="333333"/>
+                </a:solidFill>
+              </a:defRPr>
+            </a:pPr>
+            <a:r>
+              <a:t>for char in "Python":</a:t>
+            </a:r>
+          </a:p>
+          <a:p>
+            <a:pPr>
+              <a:spcAft>
+                <a:spcPts val="600"/>
+              </a:spcAft>
+              <a:defRPr sz="1600">
+                <a:solidFill>
+                  <a:srgbClr val="333333"/>
+                </a:solidFill>
+              </a:defRPr>
+            </a:pPr>
+            <a:r>
+              <a:t>    print(char)</a:t>
+            </a:r>
+          </a:p>
+          <a:p>
+            <a:pPr>
+              <a:spcAft>
+                <a:spcPts val="600"/>
+              </a:spcAft>
+              <a:defRPr b="1" sz="2000">
+                <a:solidFill>
+                  <a:srgbClr val="333333"/>
+                </a:solidFill>
+              </a:defRPr>
+            </a:pPr>
+            <a:r>
+              <a:t># Prints: P, y, t, h, o, n</a:t>
+            </a:r>
+          </a:p>
+          <a:p>
+            <a:pPr>
+              <a:spcAft>
+                <a:spcPts val="600"/>
+              </a:spcAft>
+              <a:defRPr b="1" sz="2000">
+                <a:solidFill>
+                  <a:srgbClr val="333333"/>
+                </a:solidFill>
+              </a:defRPr>
+            </a:pPr>
+            <a:r>
+              <a:t>Example with List:</a:t>
+            </a:r>
+          </a:p>
+          <a:p>
+            <a:pPr>
+              <a:spcAft>
+                <a:spcPts val="600"/>
+              </a:spcAft>
+              <a:defRPr sz="1600">
+                <a:solidFill>
+                  <a:srgbClr val="333333"/>
+                </a:solidFill>
+              </a:defRPr>
+            </a:pPr>
+            <a:r>
+              <a:t>fruits = ["apple", "banana", "orange"]</a:t>
+            </a:r>
+          </a:p>
+          <a:p>
+            <a:pPr>
+              <a:spcAft>
+                <a:spcPts val="600"/>
+              </a:spcAft>
+              <a:defRPr b="1" sz="2000">
+                <a:solidFill>
+                  <a:srgbClr val="333333"/>
+                </a:solidFill>
+              </a:defRPr>
+            </a:pPr>
+            <a:r>
+              <a:t>for fruit in fruits:</a:t>
+            </a:r>
+          </a:p>
+          <a:p>
+            <a:pPr>
+              <a:spcAft>
+                <a:spcPts val="600"/>
+              </a:spcAft>
+              <a:defRPr sz="1600">
+                <a:solidFill>
+                  <a:srgbClr val="333333"/>
+                </a:solidFill>
+              </a:defRPr>
+            </a:pPr>
+            <a:r>
+              <a:t>    print(fruit)</a:t>
+            </a:r>
+          </a:p>
+          <a:p>
+            <a:pPr>
+              <a:spcAft>
+                <a:spcPts val="600"/>
+              </a:spcAft>
+              <a:defRPr b="1" sz="2000">
+                <a:solidFill>
+                  <a:srgbClr val="333333"/>
+                </a:solidFill>
+              </a:defRPr>
+            </a:pPr>
+            <a:r>
+              <a:t>How It Works:</a:t>
+            </a:r>
+          </a:p>
+          <a:p>
+            <a:pPr>
+              <a:spcAft>
+                <a:spcPts val="600"/>
+              </a:spcAft>
+              <a:defRPr sz="1600">
+                <a:solidFill>
+                  <a:srgbClr val="333333"/>
+                </a:solidFill>
+              </a:defRPr>
+            </a:pPr>
+            <a:r>
+              <a:t>1. Get next item from sequence</a:t>
+            </a:r>
+          </a:p>
+          <a:p>
+            <a:pPr>
+              <a:spcAft>
+                <a:spcPts val="600"/>
+              </a:spcAft>
+              <a:defRPr sz="1600">
+                <a:solidFill>
+                  <a:srgbClr val="333333"/>
+                </a:solidFill>
+              </a:defRPr>
+            </a:pPr>
+            <a:r>
+              <a:t>2. Assign to loop variable</a:t>
+            </a:r>
+          </a:p>
+          <a:p>
+            <a:pPr>
+              <a:spcAft>
+                <a:spcPts val="600"/>
+              </a:spcAft>
+              <a:defRPr sz="1600">
+                <a:solidFill>
+                  <a:srgbClr val="333333"/>
+                </a:solidFill>
+              </a:defRPr>
+            </a:pPr>
+            <a:r>
+              <a:t>3. Execute loop body</a:t>
+            </a:r>
+          </a:p>
+          <a:p>
+            <a:pPr>
+              <a:spcAft>
+                <a:spcPts val="600"/>
+              </a:spcAft>
+              <a:defRPr sz="1600">
+                <a:solidFill>
+                  <a:srgbClr val="333333"/>
+                </a:solidFill>
+              </a:defRPr>
+            </a:pPr>
+            <a:r>
+              <a:t>4. Repeat until sequence ends</a:t>
+            </a:r>
+          </a:p>
+          <a:p>
+            <a:pPr>
+              <a:spcAft>
+                <a:spcPts val="600"/>
+              </a:spcAft>
+              <a:defRPr b="1" sz="2000">
+                <a:solidFill>
+                  <a:srgbClr val="333333"/>
+                </a:solidFill>
+              </a:defRPr>
+            </a:pPr>
+            <a:r>
+              <a:t>Advantage:</a:t>
+            </a:r>
+          </a:p>
+          <a:p>
+            <a:pPr lvl="1">
+              <a:spcAft>
+                <a:spcPts val="400"/>
+              </a:spcAft>
+              <a:defRPr sz="1600">
+                <a:solidFill>
+                  <a:srgbClr val="333333"/>
+                </a:solidFill>
+              </a:defRPr>
+            </a:pPr>
+            <a:r>
+              <a:t>• Automatically handles iteration</a:t>
+            </a:r>
+          </a:p>
+          <a:p>
+            <a:pPr lvl="1">
+              <a:spcAft>
+                <a:spcPts val="400"/>
+              </a:spcAft>
+              <a:defRPr sz="1600">
+                <a:solidFill>
+                  <a:srgbClr val="333333"/>
+                </a:solidFill>
+              </a:defRPr>
+            </a:pPr>
+            <a:r>
+              <a:t>• No need to update counter</a:t>
             </a:r>
           </a:p>
         </p:txBody>
@@ -5589,7 +7277,7 @@
 </p:sld>
 </file>
 
-<file path=ppt/slides/slide5.xml><?xml version="1.0" encoding="utf-8"?>
+<file path=ppt/slides/slide6.xml><?xml version="1.0" encoding="utf-8"?>
 <p:sld xmlns:a="http://schemas.openxmlformats.org/drawingml/2006/main" xmlns:p="http://schemas.openxmlformats.org/presentationml/2006/main" xmlns:r="http://schemas.openxmlformats.org/officeDocument/2006/relationships">
   <p:cSld>
     <p:spTree>
@@ -5693,8 +7381,8 @@
         </p:nvSpPr>
         <p:spPr>
           <a:xfrm>
-            <a:off x="457200" y="365760"/>
-            <a:ext cx="10972800" cy="731520"/>
+            <a:off x="457200" y="320040"/>
+            <a:ext cx="10972800" cy="640080"/>
           </a:xfrm>
           <a:prstGeom prst="rect">
             <a:avLst/>
@@ -5708,71 +7396,28 @@
           <a:lstStyle/>
           <a:p>
             <a:pPr>
-              <a:defRPr sz="4000" b="1">
+              <a:defRPr sz="3600" b="1">
                 <a:solidFill>
                   <a:srgbClr val="003366"/>
                 </a:solidFill>
               </a:defRPr>
             </a:pPr>
             <a:r>
-              <a:t>While Loops with Conditions 🎯</a:t>
-            </a:r>
-          </a:p>
-        </p:txBody>
-      </p:sp>
-      <p:sp>
-        <p:nvSpPr>
-          <p:cNvPr id="5" name="Rectangle 4"/>
-          <p:cNvSpPr/>
+              <a:t>The range() Function</a:t>
+            </a:r>
+          </a:p>
+        </p:txBody>
+      </p:sp>
+      <p:sp>
+        <p:nvSpPr>
+          <p:cNvPr id="5" name="TextBox 4"/>
+          <p:cNvSpPr txBox="1"/>
           <p:nvPr/>
         </p:nvSpPr>
         <p:spPr>
           <a:xfrm>
-            <a:off x="457200" y="1005840"/>
-            <a:ext cx="1828800" cy="45720"/>
-          </a:xfrm>
-          <a:prstGeom prst="rect">
-            <a:avLst/>
-          </a:prstGeom>
-          <a:solidFill>
-            <a:srgbClr val="0066CC"/>
-          </a:solidFill>
-          <a:ln>
-            <a:noFill/>
-          </a:ln>
-        </p:spPr>
-        <p:style>
-          <a:lnRef idx="1">
-            <a:schemeClr val="accent1"/>
-          </a:lnRef>
-          <a:fillRef idx="3">
-            <a:schemeClr val="accent1"/>
-          </a:fillRef>
-          <a:effectRef idx="2">
-            <a:schemeClr val="accent1"/>
-          </a:effectRef>
-          <a:fontRef idx="minor">
-            <a:schemeClr val="lt1"/>
-          </a:fontRef>
-        </p:style>
-        <p:txBody>
-          <a:bodyPr rtlCol="0" anchor="ctr"/>
-          <a:lstStyle/>
-          <a:p>
-            <a:pPr algn="ctr"/>
-          </a:p>
-        </p:txBody>
-      </p:sp>
-      <p:sp>
-        <p:nvSpPr>
-          <p:cNvPr id="6" name="TextBox 5"/>
-          <p:cNvSpPr txBox="1"/>
-          <p:nvPr/>
-        </p:nvSpPr>
-        <p:spPr>
-          <a:xfrm>
-            <a:off x="640080" y="1371600"/>
-            <a:ext cx="10789920" cy="4572000"/>
+            <a:off x="640080" y="1188720"/>
+            <a:ext cx="10789920" cy="5303520"/>
           </a:xfrm>
           <a:prstGeom prst="rect">
             <a:avLst/>
@@ -5787,46 +7432,316 @@
           <a:p>
             <a:pPr>
               <a:spcAft>
-                <a:spcPts val="800"/>
-              </a:spcAft>
-              <a:defRPr sz="2000" b="1">
-                <a:solidFill>
-                  <a:srgbClr val="333333"/>
-                </a:solidFill>
-              </a:defRPr>
-            </a:pPr>
-            <a:r>
-              <a:t>While loops can use any condition, not just counters</a:t>
-            </a:r>
-          </a:p>
-          <a:p>
-            <a:pPr>
-              <a:spcAft>
-                <a:spcPts val="800"/>
-              </a:spcAft>
-              <a:defRPr sz="2000" b="1">
-                <a:solidFill>
-                  <a:srgbClr val="333333"/>
-                </a:solidFill>
-              </a:defRPr>
-            </a:pPr>
-            <a:r>
-              <a:t>User Input Loop</a:t>
-            </a:r>
-          </a:p>
-          <a:p>
-            <a:pPr>
-              <a:spcAft>
-                <a:spcPts val="800"/>
-              </a:spcAft>
-              <a:defRPr sz="2000" b="1">
-                <a:solidFill>
-                  <a:srgbClr val="333333"/>
-                </a:solidFill>
-              </a:defRPr>
-            </a:pPr>
-            <a:r>
-              <a:t>Keep Doubling Until Large</a:t>
+                <a:spcPts val="600"/>
+              </a:spcAft>
+              <a:defRPr b="1" sz="2000">
+                <a:solidFill>
+                  <a:srgbClr val="333333"/>
+                </a:solidFill>
+              </a:defRPr>
+            </a:pPr>
+            <a:r>
+              <a:t>range(stop): 0 to stop-1</a:t>
+            </a:r>
+          </a:p>
+          <a:p>
+            <a:pPr>
+              <a:spcAft>
+                <a:spcPts val="600"/>
+              </a:spcAft>
+              <a:defRPr sz="1600">
+                <a:solidFill>
+                  <a:srgbClr val="333333"/>
+                </a:solidFill>
+              </a:defRPr>
+            </a:pPr>
+            <a:r>
+              <a:t>range(5)  # 0, 1, 2, 3, 4</a:t>
+            </a:r>
+          </a:p>
+          <a:p>
+            <a:pPr>
+              <a:spcAft>
+                <a:spcPts val="600"/>
+              </a:spcAft>
+              <a:defRPr b="1" sz="2000">
+                <a:solidFill>
+                  <a:srgbClr val="333333"/>
+                </a:solidFill>
+              </a:defRPr>
+            </a:pPr>
+            <a:r>
+              <a:t>for i in range(5):</a:t>
+            </a:r>
+          </a:p>
+          <a:p>
+            <a:pPr>
+              <a:spcAft>
+                <a:spcPts val="600"/>
+              </a:spcAft>
+              <a:defRPr sz="1600">
+                <a:solidFill>
+                  <a:srgbClr val="333333"/>
+                </a:solidFill>
+              </a:defRPr>
+            </a:pPr>
+            <a:r>
+              <a:t>    print(i)</a:t>
+            </a:r>
+          </a:p>
+          <a:p>
+            <a:pPr>
+              <a:spcAft>
+                <a:spcPts val="600"/>
+              </a:spcAft>
+              <a:defRPr b="1" sz="2000">
+                <a:solidFill>
+                  <a:srgbClr val="333333"/>
+                </a:solidFill>
+              </a:defRPr>
+            </a:pPr>
+            <a:r>
+              <a:t>range(start, stop): start to stop-1</a:t>
+            </a:r>
+          </a:p>
+          <a:p>
+            <a:pPr>
+              <a:spcAft>
+                <a:spcPts val="600"/>
+              </a:spcAft>
+              <a:defRPr sz="1600">
+                <a:solidFill>
+                  <a:srgbClr val="333333"/>
+                </a:solidFill>
+              </a:defRPr>
+            </a:pPr>
+            <a:r>
+              <a:t>range(2, 6)  # 2, 3, 4, 5</a:t>
+            </a:r>
+          </a:p>
+          <a:p>
+            <a:pPr>
+              <a:spcAft>
+                <a:spcPts val="600"/>
+              </a:spcAft>
+              <a:defRPr b="1" sz="2000">
+                <a:solidFill>
+                  <a:srgbClr val="333333"/>
+                </a:solidFill>
+              </a:defRPr>
+            </a:pPr>
+            <a:r>
+              <a:t>for i in range(2, 6):</a:t>
+            </a:r>
+          </a:p>
+          <a:p>
+            <a:pPr>
+              <a:spcAft>
+                <a:spcPts val="600"/>
+              </a:spcAft>
+              <a:defRPr sz="1600">
+                <a:solidFill>
+                  <a:srgbClr val="333333"/>
+                </a:solidFill>
+              </a:defRPr>
+            </a:pPr>
+            <a:r>
+              <a:t>    print(i)</a:t>
+            </a:r>
+          </a:p>
+          <a:p>
+            <a:pPr>
+              <a:spcAft>
+                <a:spcPts val="600"/>
+              </a:spcAft>
+              <a:defRPr b="1" sz="2000">
+                <a:solidFill>
+                  <a:srgbClr val="333333"/>
+                </a:solidFill>
+              </a:defRPr>
+            </a:pPr>
+            <a:r>
+              <a:t>range(start, stop, step): with step</a:t>
+            </a:r>
+          </a:p>
+          <a:p>
+            <a:pPr>
+              <a:spcAft>
+                <a:spcPts val="600"/>
+              </a:spcAft>
+              <a:defRPr sz="1600">
+                <a:solidFill>
+                  <a:srgbClr val="333333"/>
+                </a:solidFill>
+              </a:defRPr>
+            </a:pPr>
+            <a:r>
+              <a:t>range(0, 10, 2)  # 0, 2, 4, 6, 8</a:t>
+            </a:r>
+          </a:p>
+          <a:p>
+            <a:pPr>
+              <a:spcAft>
+                <a:spcPts val="600"/>
+              </a:spcAft>
+              <a:defRPr b="1" sz="2000">
+                <a:solidFill>
+                  <a:srgbClr val="333333"/>
+                </a:solidFill>
+              </a:defRPr>
+            </a:pPr>
+            <a:r>
+              <a:t>for i in range(0, 10, 2):</a:t>
+            </a:r>
+          </a:p>
+          <a:p>
+            <a:pPr>
+              <a:spcAft>
+                <a:spcPts val="600"/>
+              </a:spcAft>
+              <a:defRPr sz="1600">
+                <a:solidFill>
+                  <a:srgbClr val="333333"/>
+                </a:solidFill>
+              </a:defRPr>
+            </a:pPr>
+            <a:r>
+              <a:t>    print(i)</a:t>
+            </a:r>
+          </a:p>
+          <a:p>
+            <a:pPr>
+              <a:spcAft>
+                <a:spcPts val="600"/>
+              </a:spcAft>
+              <a:defRPr b="1" sz="2000">
+                <a:solidFill>
+                  <a:srgbClr val="333333"/>
+                </a:solidFill>
+              </a:defRPr>
+            </a:pPr>
+            <a:r>
+              <a:t>Negative Step (Countdown):</a:t>
+            </a:r>
+          </a:p>
+          <a:p>
+            <a:pPr>
+              <a:spcAft>
+                <a:spcPts val="600"/>
+              </a:spcAft>
+              <a:defRPr sz="1600">
+                <a:solidFill>
+                  <a:srgbClr val="333333"/>
+                </a:solidFill>
+              </a:defRPr>
+            </a:pPr>
+            <a:r>
+              <a:t>range(10, 0, -1)  # 10, 9, 8, ..., 1</a:t>
+            </a:r>
+          </a:p>
+          <a:p>
+            <a:pPr>
+              <a:spcAft>
+                <a:spcPts val="600"/>
+              </a:spcAft>
+              <a:defRPr b="1" sz="2000">
+                <a:solidFill>
+                  <a:srgbClr val="333333"/>
+                </a:solidFill>
+              </a:defRPr>
+            </a:pPr>
+            <a:r>
+              <a:t>for i in range(10, 0, -1):</a:t>
+            </a:r>
+          </a:p>
+          <a:p>
+            <a:pPr>
+              <a:spcAft>
+                <a:spcPts val="600"/>
+              </a:spcAft>
+              <a:defRPr sz="1600">
+                <a:solidFill>
+                  <a:srgbClr val="333333"/>
+                </a:solidFill>
+              </a:defRPr>
+            </a:pPr>
+            <a:r>
+              <a:t>    print(i)</a:t>
+            </a:r>
+          </a:p>
+          <a:p>
+            <a:pPr>
+              <a:spcAft>
+                <a:spcPts val="600"/>
+              </a:spcAft>
+              <a:defRPr b="1" sz="2000">
+                <a:solidFill>
+                  <a:srgbClr val="333333"/>
+                </a:solidFill>
+              </a:defRPr>
+            </a:pPr>
+            <a:r>
+              <a:t>Converting to List:</a:t>
+            </a:r>
+          </a:p>
+          <a:p>
+            <a:pPr>
+              <a:spcAft>
+                <a:spcPts val="600"/>
+              </a:spcAft>
+              <a:defRPr sz="1600">
+                <a:solidFill>
+                  <a:srgbClr val="333333"/>
+                </a:solidFill>
+              </a:defRPr>
+            </a:pPr>
+            <a:r>
+              <a:t>list(range(5))  # [0, 1, 2, 3, 4]</a:t>
+            </a:r>
+          </a:p>
+          <a:p>
+            <a:pPr>
+              <a:spcAft>
+                <a:spcPts val="600"/>
+              </a:spcAft>
+              <a:defRPr b="1" sz="2000">
+                <a:solidFill>
+                  <a:srgbClr val="333333"/>
+                </a:solidFill>
+              </a:defRPr>
+            </a:pPr>
+            <a:r>
+              <a:t>Common Patterns:</a:t>
+            </a:r>
+          </a:p>
+          <a:p>
+            <a:pPr>
+              <a:spcAft>
+                <a:spcPts val="600"/>
+              </a:spcAft>
+              <a:defRPr sz="1600">
+                <a:solidFill>
+                  <a:srgbClr val="333333"/>
+                </a:solidFill>
+              </a:defRPr>
+            </a:pPr>
+            <a:r>
+              <a:t>range(n)        # n times</a:t>
+            </a:r>
+          </a:p>
+          <a:p>
+            <a:pPr>
+              <a:spcAft>
+                <a:spcPts val="600"/>
+              </a:spcAft>
+              <a:defRPr sz="1600">
+                <a:solidFill>
+                  <a:srgbClr val="333333"/>
+                </a:solidFill>
+              </a:defRPr>
+            </a:pPr>
+            <a:r>
+              <a:t>range(1, n+1)   # 1 to n inclusive</a:t>
             </a:r>
           </a:p>
         </p:txBody>
@@ -5839,7 +7754,7 @@
 </p:sld>
 </file>
 
-<file path=ppt/slides/slide6.xml><?xml version="1.0" encoding="utf-8"?>
+<file path=ppt/slides/slide7.xml><?xml version="1.0" encoding="utf-8"?>
 <p:sld xmlns:a="http://schemas.openxmlformats.org/drawingml/2006/main" xmlns:p="http://schemas.openxmlformats.org/presentationml/2006/main" xmlns:r="http://schemas.openxmlformats.org/officeDocument/2006/relationships">
   <p:cSld>
     <p:spTree>
@@ -5943,8 +7858,8 @@
         </p:nvSpPr>
         <p:spPr>
           <a:xfrm>
-            <a:off x="457200" y="365760"/>
-            <a:ext cx="10972800" cy="731520"/>
+            <a:off x="457200" y="320040"/>
+            <a:ext cx="10972800" cy="640080"/>
           </a:xfrm>
           <a:prstGeom prst="rect">
             <a:avLst/>
@@ -5958,71 +7873,28 @@
           <a:lstStyle/>
           <a:p>
             <a:pPr>
-              <a:defRPr sz="4000" b="1">
+              <a:defRPr sz="3600" b="1">
                 <a:solidFill>
                   <a:srgbClr val="003366"/>
                 </a:solidFill>
               </a:defRPr>
             </a:pPr>
             <a:r>
-              <a:t>For Loops: Iterate Through Items 🔁</a:t>
-            </a:r>
-          </a:p>
-        </p:txBody>
-      </p:sp>
-      <p:sp>
-        <p:nvSpPr>
-          <p:cNvPr id="5" name="Rectangle 4"/>
-          <p:cNvSpPr/>
+              <a:t>Break Statement</a:t>
+            </a:r>
+          </a:p>
+        </p:txBody>
+      </p:sp>
+      <p:sp>
+        <p:nvSpPr>
+          <p:cNvPr id="5" name="TextBox 4"/>
+          <p:cNvSpPr txBox="1"/>
           <p:nvPr/>
         </p:nvSpPr>
         <p:spPr>
           <a:xfrm>
-            <a:off x="457200" y="1005840"/>
-            <a:ext cx="1828800" cy="45720"/>
-          </a:xfrm>
-          <a:prstGeom prst="rect">
-            <a:avLst/>
-          </a:prstGeom>
-          <a:solidFill>
-            <a:srgbClr val="0066CC"/>
-          </a:solidFill>
-          <a:ln>
-            <a:noFill/>
-          </a:ln>
-        </p:spPr>
-        <p:style>
-          <a:lnRef idx="1">
-            <a:schemeClr val="accent1"/>
-          </a:lnRef>
-          <a:fillRef idx="3">
-            <a:schemeClr val="accent1"/>
-          </a:fillRef>
-          <a:effectRef idx="2">
-            <a:schemeClr val="accent1"/>
-          </a:effectRef>
-          <a:fontRef idx="minor">
-            <a:schemeClr val="lt1"/>
-          </a:fontRef>
-        </p:style>
-        <p:txBody>
-          <a:bodyPr rtlCol="0" anchor="ctr"/>
-          <a:lstStyle/>
-          <a:p>
-            <a:pPr algn="ctr"/>
-          </a:p>
-        </p:txBody>
-      </p:sp>
-      <p:sp>
-        <p:nvSpPr>
-          <p:cNvPr id="6" name="TextBox 5"/>
-          <p:cNvSpPr txBox="1"/>
-          <p:nvPr/>
-        </p:nvSpPr>
-        <p:spPr>
-          <a:xfrm>
-            <a:off x="640080" y="1371600"/>
-            <a:ext cx="10789920" cy="4572000"/>
+            <a:off x="640080" y="1188720"/>
+            <a:ext cx="10789920" cy="5303520"/>
           </a:xfrm>
           <a:prstGeom prst="rect">
             <a:avLst/>
@@ -6037,76 +7909,406 @@
           <a:p>
             <a:pPr>
               <a:spcAft>
-                <a:spcPts val="800"/>
-              </a:spcAft>
-              <a:defRPr sz="2000" b="1">
-                <a:solidFill>
-                  <a:srgbClr val="333333"/>
-                </a:solidFill>
-              </a:defRPr>
-            </a:pPr>
-            <a:r>
-              <a:t>For loops iterate through a sequence of items</a:t>
-            </a:r>
-          </a:p>
-          <a:p>
-            <a:pPr>
-              <a:spcAft>
-                <a:spcPts val="800"/>
-              </a:spcAft>
-              <a:defRPr sz="2000" b="1">
-                <a:solidFill>
-                  <a:srgbClr val="333333"/>
-                </a:solidFill>
-              </a:defRPr>
-            </a:pPr>
-            <a:r>
-              <a:t>Syntax:</a:t>
-            </a:r>
-          </a:p>
-          <a:p>
-            <a:pPr>
-              <a:spcAft>
-                <a:spcPts val="800"/>
-              </a:spcAft>
-              <a:defRPr sz="2000" b="1">
-                <a:solidFill>
-                  <a:srgbClr val="333333"/>
-                </a:solidFill>
-              </a:defRPr>
-            </a:pPr>
-            <a:r>
-              <a:t>Example: Loop Through a String</a:t>
-            </a:r>
-          </a:p>
-          <a:p>
-            <a:pPr>
-              <a:spcAft>
-                <a:spcPts val="800"/>
-              </a:spcAft>
-              <a:defRPr sz="2000" b="1">
-                <a:solidFill>
-                  <a:srgbClr val="333333"/>
-                </a:solidFill>
-              </a:defRPr>
-            </a:pPr>
-            <a:r>
-              <a:t>Output:</a:t>
-            </a:r>
-          </a:p>
-          <a:p>
-            <a:pPr>
-              <a:spcAft>
-                <a:spcPts val="800"/>
-              </a:spcAft>
-              <a:defRPr sz="2000" b="1">
-                <a:solidFill>
-                  <a:srgbClr val="333333"/>
-                </a:solidFill>
-              </a:defRPr>
-            </a:pPr>
-            <a:r>
-              <a:t>Each iteration:letter gets the next character from the string</a:t>
+                <a:spcPts val="600"/>
+              </a:spcAft>
+              <a:defRPr b="1" sz="2000">
+                <a:solidFill>
+                  <a:srgbClr val="333333"/>
+                </a:solidFill>
+              </a:defRPr>
+            </a:pPr>
+            <a:r>
+              <a:t>Exit Loop Early:</a:t>
+            </a:r>
+          </a:p>
+          <a:p>
+            <a:pPr lvl="1">
+              <a:spcAft>
+                <a:spcPts val="400"/>
+              </a:spcAft>
+              <a:defRPr sz="1600">
+                <a:solidFill>
+                  <a:srgbClr val="333333"/>
+                </a:solidFill>
+              </a:defRPr>
+            </a:pPr>
+            <a:r>
+              <a:t>• Immediately exits the loop</a:t>
+            </a:r>
+          </a:p>
+          <a:p>
+            <a:pPr lvl="1">
+              <a:spcAft>
+                <a:spcPts val="400"/>
+              </a:spcAft>
+              <a:defRPr sz="1600">
+                <a:solidFill>
+                  <a:srgbClr val="333333"/>
+                </a:solidFill>
+              </a:defRPr>
+            </a:pPr>
+            <a:r>
+              <a:t>• Skips remaining iterations</a:t>
+            </a:r>
+          </a:p>
+          <a:p>
+            <a:pPr lvl="1">
+              <a:spcAft>
+                <a:spcPts val="400"/>
+              </a:spcAft>
+              <a:defRPr sz="1600">
+                <a:solidFill>
+                  <a:srgbClr val="333333"/>
+                </a:solidFill>
+              </a:defRPr>
+            </a:pPr>
+            <a:r>
+              <a:t>• Continues after loop</a:t>
+            </a:r>
+          </a:p>
+          <a:p>
+            <a:pPr>
+              <a:spcAft>
+                <a:spcPts val="600"/>
+              </a:spcAft>
+              <a:defRPr b="1" sz="2000">
+                <a:solidFill>
+                  <a:srgbClr val="333333"/>
+                </a:solidFill>
+              </a:defRPr>
+            </a:pPr>
+            <a:r>
+              <a:t>Basic Example:</a:t>
+            </a:r>
+          </a:p>
+          <a:p>
+            <a:pPr>
+              <a:spcAft>
+                <a:spcPts val="600"/>
+              </a:spcAft>
+              <a:defRPr b="1" sz="2000">
+                <a:solidFill>
+                  <a:srgbClr val="333333"/>
+                </a:solidFill>
+              </a:defRPr>
+            </a:pPr>
+            <a:r>
+              <a:t>for i in range(10):</a:t>
+            </a:r>
+          </a:p>
+          <a:p>
+            <a:pPr>
+              <a:spcAft>
+                <a:spcPts val="600"/>
+              </a:spcAft>
+              <a:defRPr sz="1600">
+                <a:solidFill>
+                  <a:srgbClr val="333333"/>
+                </a:solidFill>
+              </a:defRPr>
+            </a:pPr>
+            <a:r>
+              <a:t>    if i == 5:</a:t>
+            </a:r>
+          </a:p>
+          <a:p>
+            <a:pPr>
+              <a:spcAft>
+                <a:spcPts val="600"/>
+              </a:spcAft>
+              <a:defRPr sz="1600">
+                <a:solidFill>
+                  <a:srgbClr val="333333"/>
+                </a:solidFill>
+              </a:defRPr>
+            </a:pPr>
+            <a:r>
+              <a:t>        break</a:t>
+            </a:r>
+          </a:p>
+          <a:p>
+            <a:pPr>
+              <a:spcAft>
+                <a:spcPts val="600"/>
+              </a:spcAft>
+              <a:defRPr sz="1600">
+                <a:solidFill>
+                  <a:srgbClr val="333333"/>
+                </a:solidFill>
+              </a:defRPr>
+            </a:pPr>
+            <a:r>
+              <a:t>    print(i)</a:t>
+            </a:r>
+          </a:p>
+          <a:p>
+            <a:pPr>
+              <a:spcAft>
+                <a:spcPts val="600"/>
+              </a:spcAft>
+              <a:defRPr b="1" sz="2000">
+                <a:solidFill>
+                  <a:srgbClr val="333333"/>
+                </a:solidFill>
+              </a:defRPr>
+            </a:pPr>
+            <a:r>
+              <a:t># Prints: 0, 1, 2, 3, 4</a:t>
+            </a:r>
+          </a:p>
+          <a:p>
+            <a:pPr>
+              <a:spcAft>
+                <a:spcPts val="600"/>
+              </a:spcAft>
+              <a:defRPr b="1" sz="2000">
+                <a:solidFill>
+                  <a:srgbClr val="333333"/>
+                </a:solidFill>
+              </a:defRPr>
+            </a:pPr>
+            <a:r>
+              <a:t>Search Example:</a:t>
+            </a:r>
+          </a:p>
+          <a:p>
+            <a:pPr>
+              <a:spcAft>
+                <a:spcPts val="600"/>
+              </a:spcAft>
+              <a:defRPr sz="1600">
+                <a:solidFill>
+                  <a:srgbClr val="333333"/>
+                </a:solidFill>
+              </a:defRPr>
+            </a:pPr>
+            <a:r>
+              <a:t>numbers = [3, 7, 2, 9, 5]</a:t>
+            </a:r>
+          </a:p>
+          <a:p>
+            <a:pPr>
+              <a:spcAft>
+                <a:spcPts val="600"/>
+              </a:spcAft>
+              <a:defRPr sz="1600">
+                <a:solidFill>
+                  <a:srgbClr val="333333"/>
+                </a:solidFill>
+              </a:defRPr>
+            </a:pPr>
+            <a:r>
+              <a:t>target = 9</a:t>
+            </a:r>
+          </a:p>
+          <a:p>
+            <a:pPr>
+              <a:spcAft>
+                <a:spcPts val="600"/>
+              </a:spcAft>
+              <a:defRPr b="1" sz="2000">
+                <a:solidFill>
+                  <a:srgbClr val="333333"/>
+                </a:solidFill>
+              </a:defRPr>
+            </a:pPr>
+            <a:r>
+              <a:t>for num in numbers:</a:t>
+            </a:r>
+          </a:p>
+          <a:p>
+            <a:pPr>
+              <a:spcAft>
+                <a:spcPts val="600"/>
+              </a:spcAft>
+              <a:defRPr sz="1600">
+                <a:solidFill>
+                  <a:srgbClr val="333333"/>
+                </a:solidFill>
+              </a:defRPr>
+            </a:pPr>
+            <a:r>
+              <a:t>    if num == target:</a:t>
+            </a:r>
+          </a:p>
+          <a:p>
+            <a:pPr>
+              <a:spcAft>
+                <a:spcPts val="600"/>
+              </a:spcAft>
+              <a:defRPr sz="1600">
+                <a:solidFill>
+                  <a:srgbClr val="333333"/>
+                </a:solidFill>
+              </a:defRPr>
+            </a:pPr>
+            <a:r>
+              <a:t>        print("Found!")</a:t>
+            </a:r>
+          </a:p>
+          <a:p>
+            <a:pPr>
+              <a:spcAft>
+                <a:spcPts val="600"/>
+              </a:spcAft>
+              <a:defRPr sz="1600">
+                <a:solidFill>
+                  <a:srgbClr val="333333"/>
+                </a:solidFill>
+              </a:defRPr>
+            </a:pPr>
+            <a:r>
+              <a:t>        break</a:t>
+            </a:r>
+          </a:p>
+          <a:p>
+            <a:pPr>
+              <a:spcAft>
+                <a:spcPts val="600"/>
+              </a:spcAft>
+              <a:defRPr b="1" sz="2000">
+                <a:solidFill>
+                  <a:srgbClr val="333333"/>
+                </a:solidFill>
+              </a:defRPr>
+            </a:pPr>
+            <a:r>
+              <a:t>User Input Loop:</a:t>
+            </a:r>
+          </a:p>
+          <a:p>
+            <a:pPr>
+              <a:spcAft>
+                <a:spcPts val="600"/>
+              </a:spcAft>
+              <a:defRPr b="1" sz="2000">
+                <a:solidFill>
+                  <a:srgbClr val="333333"/>
+                </a:solidFill>
+              </a:defRPr>
+            </a:pPr>
+            <a:r>
+              <a:t>while True:</a:t>
+            </a:r>
+          </a:p>
+          <a:p>
+            <a:pPr>
+              <a:spcAft>
+                <a:spcPts val="600"/>
+              </a:spcAft>
+              <a:defRPr sz="1600">
+                <a:solidFill>
+                  <a:srgbClr val="333333"/>
+                </a:solidFill>
+              </a:defRPr>
+            </a:pPr>
+            <a:r>
+              <a:t>    command = input("Enter command: ")</a:t>
+            </a:r>
+          </a:p>
+          <a:p>
+            <a:pPr>
+              <a:spcAft>
+                <a:spcPts val="600"/>
+              </a:spcAft>
+              <a:defRPr sz="1600">
+                <a:solidFill>
+                  <a:srgbClr val="333333"/>
+                </a:solidFill>
+              </a:defRPr>
+            </a:pPr>
+            <a:r>
+              <a:t>    if command == "quit":</a:t>
+            </a:r>
+          </a:p>
+          <a:p>
+            <a:pPr>
+              <a:spcAft>
+                <a:spcPts val="600"/>
+              </a:spcAft>
+              <a:defRPr sz="1600">
+                <a:solidFill>
+                  <a:srgbClr val="333333"/>
+                </a:solidFill>
+              </a:defRPr>
+            </a:pPr>
+            <a:r>
+              <a:t>        break</a:t>
+            </a:r>
+          </a:p>
+          <a:p>
+            <a:pPr>
+              <a:spcAft>
+                <a:spcPts val="600"/>
+              </a:spcAft>
+              <a:defRPr sz="1600">
+                <a:solidFill>
+                  <a:srgbClr val="333333"/>
+                </a:solidFill>
+              </a:defRPr>
+            </a:pPr>
+            <a:r>
+              <a:t>    print(f"You entered: {command}")</a:t>
+            </a:r>
+          </a:p>
+          <a:p>
+            <a:pPr>
+              <a:spcAft>
+                <a:spcPts val="600"/>
+              </a:spcAft>
+              <a:defRPr b="1" sz="2000">
+                <a:solidFill>
+                  <a:srgbClr val="333333"/>
+                </a:solidFill>
+              </a:defRPr>
+            </a:pPr>
+            <a:r>
+              <a:t>When to Use:</a:t>
+            </a:r>
+          </a:p>
+          <a:p>
+            <a:pPr lvl="1">
+              <a:spcAft>
+                <a:spcPts val="400"/>
+              </a:spcAft>
+              <a:defRPr sz="1600">
+                <a:solidFill>
+                  <a:srgbClr val="333333"/>
+                </a:solidFill>
+              </a:defRPr>
+            </a:pPr>
+            <a:r>
+              <a:t>• Found what you're looking for</a:t>
+            </a:r>
+          </a:p>
+          <a:p>
+            <a:pPr lvl="1">
+              <a:spcAft>
+                <a:spcPts val="400"/>
+              </a:spcAft>
+              <a:defRPr sz="1600">
+                <a:solidFill>
+                  <a:srgbClr val="333333"/>
+                </a:solidFill>
+              </a:defRPr>
+            </a:pPr>
+            <a:r>
+              <a:t>• Error condition detected</a:t>
+            </a:r>
+          </a:p>
+          <a:p>
+            <a:pPr lvl="1">
+              <a:spcAft>
+                <a:spcPts val="400"/>
+              </a:spcAft>
+              <a:defRPr sz="1600">
+                <a:solidFill>
+                  <a:srgbClr val="333333"/>
+                </a:solidFill>
+              </a:defRPr>
+            </a:pPr>
+            <a:r>
+              <a:t>• User wants to exit</a:t>
             </a:r>
           </a:p>
         </p:txBody>
@@ -6119,7 +8321,7 @@
 </p:sld>
 </file>
 
-<file path=ppt/slides/slide7.xml><?xml version="1.0" encoding="utf-8"?>
+<file path=ppt/slides/slide8.xml><?xml version="1.0" encoding="utf-8"?>
 <p:sld xmlns:a="http://schemas.openxmlformats.org/drawingml/2006/main" xmlns:p="http://schemas.openxmlformats.org/presentationml/2006/main" xmlns:r="http://schemas.openxmlformats.org/officeDocument/2006/relationships">
   <p:cSld>
     <p:spTree>
@@ -6223,8 +8425,8 @@
         </p:nvSpPr>
         <p:spPr>
           <a:xfrm>
-            <a:off x="457200" y="365760"/>
-            <a:ext cx="10972800" cy="731520"/>
+            <a:off x="457200" y="320040"/>
+            <a:ext cx="10972800" cy="640080"/>
           </a:xfrm>
           <a:prstGeom prst="rect">
             <a:avLst/>
@@ -6238,71 +8440,28 @@
           <a:lstStyle/>
           <a:p>
             <a:pPr>
-              <a:defRPr sz="4000" b="1">
+              <a:defRPr sz="3600" b="1">
                 <a:solidFill>
                   <a:srgbClr val="003366"/>
                 </a:solidFill>
               </a:defRPr>
             </a:pPr>
             <a:r>
-              <a:t>The range() Function 📊</a:t>
-            </a:r>
-          </a:p>
-        </p:txBody>
-      </p:sp>
-      <p:sp>
-        <p:nvSpPr>
-          <p:cNvPr id="5" name="Rectangle 4"/>
-          <p:cNvSpPr/>
+              <a:t>Continue Statement</a:t>
+            </a:r>
+          </a:p>
+        </p:txBody>
+      </p:sp>
+      <p:sp>
+        <p:nvSpPr>
+          <p:cNvPr id="5" name="TextBox 4"/>
+          <p:cNvSpPr txBox="1"/>
           <p:nvPr/>
         </p:nvSpPr>
         <p:spPr>
           <a:xfrm>
-            <a:off x="457200" y="1005840"/>
-            <a:ext cx="1828800" cy="45720"/>
-          </a:xfrm>
-          <a:prstGeom prst="rect">
-            <a:avLst/>
-          </a:prstGeom>
-          <a:solidFill>
-            <a:srgbClr val="0066CC"/>
-          </a:solidFill>
-          <a:ln>
-            <a:noFill/>
-          </a:ln>
-        </p:spPr>
-        <p:style>
-          <a:lnRef idx="1">
-            <a:schemeClr val="accent1"/>
-          </a:lnRef>
-          <a:fillRef idx="3">
-            <a:schemeClr val="accent1"/>
-          </a:fillRef>
-          <a:effectRef idx="2">
-            <a:schemeClr val="accent1"/>
-          </a:effectRef>
-          <a:fontRef idx="minor">
-            <a:schemeClr val="lt1"/>
-          </a:fontRef>
-        </p:style>
-        <p:txBody>
-          <a:bodyPr rtlCol="0" anchor="ctr"/>
-          <a:lstStyle/>
-          <a:p>
-            <a:pPr algn="ctr"/>
-          </a:p>
-        </p:txBody>
-      </p:sp>
-      <p:sp>
-        <p:nvSpPr>
-          <p:cNvPr id="6" name="TextBox 5"/>
-          <p:cNvSpPr txBox="1"/>
-          <p:nvPr/>
-        </p:nvSpPr>
-        <p:spPr>
-          <a:xfrm>
-            <a:off x="640080" y="1371600"/>
-            <a:ext cx="10789920" cy="4572000"/>
+            <a:off x="640080" y="1188720"/>
+            <a:ext cx="10789920" cy="5303520"/>
           </a:xfrm>
           <a:prstGeom prst="rect">
             <a:avLst/>
@@ -6317,61 +8476,391 @@
           <a:p>
             <a:pPr>
               <a:spcAft>
-                <a:spcPts val="800"/>
-              </a:spcAft>
-              <a:defRPr sz="2000" b="1">
-                <a:solidFill>
-                  <a:srgbClr val="333333"/>
-                </a:solidFill>
-              </a:defRPr>
-            </a:pPr>
-            <a:r>
-              <a:t>range() generates a sequence of numbers for loops</a:t>
-            </a:r>
-          </a:p>
-          <a:p>
-            <a:pPr>
-              <a:spcAft>
-                <a:spcPts val="800"/>
-              </a:spcAft>
-              <a:defRPr sz="2000" b="1">
-                <a:solidFill>
-                  <a:srgbClr val="333333"/>
-                </a:solidFill>
-              </a:defRPr>
-            </a:pPr>
-            <a:r>
-              <a:t>1. range(stop) - Single Parameter</a:t>
-            </a:r>
-          </a:p>
-          <a:p>
-            <a:pPr>
-              <a:spcAft>
-                <a:spcPts val="800"/>
-              </a:spcAft>
-              <a:defRPr sz="2000" b="1">
-                <a:solidFill>
-                  <a:srgbClr val="333333"/>
-                </a:solidFill>
-              </a:defRPr>
-            </a:pPr>
-            <a:r>
-              <a:t>2. range(start, stop) - Two Parameters</a:t>
-            </a:r>
-          </a:p>
-          <a:p>
-            <a:pPr>
-              <a:spcAft>
-                <a:spcPts val="800"/>
-              </a:spcAft>
-              <a:defRPr sz="2000" b="1">
-                <a:solidFill>
-                  <a:srgbClr val="333333"/>
-                </a:solidFill>
-              </a:defRPr>
-            </a:pPr>
-            <a:r>
-              <a:t>3. range(start, stop, step) - Three Parameters</a:t>
+                <a:spcPts val="600"/>
+              </a:spcAft>
+              <a:defRPr b="1" sz="2000">
+                <a:solidFill>
+                  <a:srgbClr val="333333"/>
+                </a:solidFill>
+              </a:defRPr>
+            </a:pPr>
+            <a:r>
+              <a:t>Skip to Next Iteration:</a:t>
+            </a:r>
+          </a:p>
+          <a:p>
+            <a:pPr lvl="1">
+              <a:spcAft>
+                <a:spcPts val="400"/>
+              </a:spcAft>
+              <a:defRPr sz="1600">
+                <a:solidFill>
+                  <a:srgbClr val="333333"/>
+                </a:solidFill>
+              </a:defRPr>
+            </a:pPr>
+            <a:r>
+              <a:t>• Skips remaining code in loop body</a:t>
+            </a:r>
+          </a:p>
+          <a:p>
+            <a:pPr lvl="1">
+              <a:spcAft>
+                <a:spcPts val="400"/>
+              </a:spcAft>
+              <a:defRPr sz="1600">
+                <a:solidFill>
+                  <a:srgbClr val="333333"/>
+                </a:solidFill>
+              </a:defRPr>
+            </a:pPr>
+            <a:r>
+              <a:t>• Moves to next iteration</a:t>
+            </a:r>
+          </a:p>
+          <a:p>
+            <a:pPr lvl="1">
+              <a:spcAft>
+                <a:spcPts val="400"/>
+              </a:spcAft>
+              <a:defRPr sz="1600">
+                <a:solidFill>
+                  <a:srgbClr val="333333"/>
+                </a:solidFill>
+              </a:defRPr>
+            </a:pPr>
+            <a:r>
+              <a:t>• Loop continues running</a:t>
+            </a:r>
+          </a:p>
+          <a:p>
+            <a:pPr>
+              <a:spcAft>
+                <a:spcPts val="600"/>
+              </a:spcAft>
+              <a:defRPr b="1" sz="2000">
+                <a:solidFill>
+                  <a:srgbClr val="333333"/>
+                </a:solidFill>
+              </a:defRPr>
+            </a:pPr>
+            <a:r>
+              <a:t>Basic Example:</a:t>
+            </a:r>
+          </a:p>
+          <a:p>
+            <a:pPr>
+              <a:spcAft>
+                <a:spcPts val="600"/>
+              </a:spcAft>
+              <a:defRPr b="1" sz="2000">
+                <a:solidFill>
+                  <a:srgbClr val="333333"/>
+                </a:solidFill>
+              </a:defRPr>
+            </a:pPr>
+            <a:r>
+              <a:t>for i in range(10):</a:t>
+            </a:r>
+          </a:p>
+          <a:p>
+            <a:pPr>
+              <a:spcAft>
+                <a:spcPts val="600"/>
+              </a:spcAft>
+              <a:defRPr sz="1600">
+                <a:solidFill>
+                  <a:srgbClr val="333333"/>
+                </a:solidFill>
+              </a:defRPr>
+            </a:pPr>
+            <a:r>
+              <a:t>    if i % 2 == 0:</a:t>
+            </a:r>
+          </a:p>
+          <a:p>
+            <a:pPr>
+              <a:spcAft>
+                <a:spcPts val="600"/>
+              </a:spcAft>
+              <a:defRPr sz="1600">
+                <a:solidFill>
+                  <a:srgbClr val="333333"/>
+                </a:solidFill>
+              </a:defRPr>
+            </a:pPr>
+            <a:r>
+              <a:t>        continue</a:t>
+            </a:r>
+          </a:p>
+          <a:p>
+            <a:pPr>
+              <a:spcAft>
+                <a:spcPts val="600"/>
+              </a:spcAft>
+              <a:defRPr sz="1600">
+                <a:solidFill>
+                  <a:srgbClr val="333333"/>
+                </a:solidFill>
+              </a:defRPr>
+            </a:pPr>
+            <a:r>
+              <a:t>    print(i)</a:t>
+            </a:r>
+          </a:p>
+          <a:p>
+            <a:pPr>
+              <a:spcAft>
+                <a:spcPts val="600"/>
+              </a:spcAft>
+              <a:defRPr b="1" sz="2000">
+                <a:solidFill>
+                  <a:srgbClr val="333333"/>
+                </a:solidFill>
+              </a:defRPr>
+            </a:pPr>
+            <a:r>
+              <a:t># Prints: 1, 3, 5, 7, 9 (odd numbers)</a:t>
+            </a:r>
+          </a:p>
+          <a:p>
+            <a:pPr>
+              <a:spcAft>
+                <a:spcPts val="600"/>
+              </a:spcAft>
+              <a:defRPr b="1" sz="2000">
+                <a:solidFill>
+                  <a:srgbClr val="333333"/>
+                </a:solidFill>
+              </a:defRPr>
+            </a:pPr>
+            <a:r>
+              <a:t>Skip Invalid Data:</a:t>
+            </a:r>
+          </a:p>
+          <a:p>
+            <a:pPr>
+              <a:spcAft>
+                <a:spcPts val="600"/>
+              </a:spcAft>
+              <a:defRPr sz="1600">
+                <a:solidFill>
+                  <a:srgbClr val="333333"/>
+                </a:solidFill>
+              </a:defRPr>
+            </a:pPr>
+            <a:r>
+              <a:t>numbers = [5, 0, 8, 0, 3]</a:t>
+            </a:r>
+          </a:p>
+          <a:p>
+            <a:pPr>
+              <a:spcAft>
+                <a:spcPts val="600"/>
+              </a:spcAft>
+              <a:defRPr b="1" sz="2000">
+                <a:solidFill>
+                  <a:srgbClr val="333333"/>
+                </a:solidFill>
+              </a:defRPr>
+            </a:pPr>
+            <a:r>
+              <a:t>for num in numbers:</a:t>
+            </a:r>
+          </a:p>
+          <a:p>
+            <a:pPr>
+              <a:spcAft>
+                <a:spcPts val="600"/>
+              </a:spcAft>
+              <a:defRPr sz="1600">
+                <a:solidFill>
+                  <a:srgbClr val="333333"/>
+                </a:solidFill>
+              </a:defRPr>
+            </a:pPr>
+            <a:r>
+              <a:t>    if num == 0:</a:t>
+            </a:r>
+          </a:p>
+          <a:p>
+            <a:pPr>
+              <a:spcAft>
+                <a:spcPts val="600"/>
+              </a:spcAft>
+              <a:defRPr sz="1600">
+                <a:solidFill>
+                  <a:srgbClr val="333333"/>
+                </a:solidFill>
+              </a:defRPr>
+            </a:pPr>
+            <a:r>
+              <a:t>        continue</a:t>
+            </a:r>
+          </a:p>
+          <a:p>
+            <a:pPr>
+              <a:spcAft>
+                <a:spcPts val="600"/>
+              </a:spcAft>
+              <a:defRPr sz="1600">
+                <a:solidFill>
+                  <a:srgbClr val="333333"/>
+                </a:solidFill>
+              </a:defRPr>
+            </a:pPr>
+            <a:r>
+              <a:t>    print(10 / num)</a:t>
+            </a:r>
+          </a:p>
+          <a:p>
+            <a:pPr>
+              <a:spcAft>
+                <a:spcPts val="600"/>
+              </a:spcAft>
+              <a:defRPr b="1" sz="2000">
+                <a:solidFill>
+                  <a:srgbClr val="333333"/>
+                </a:solidFill>
+              </a:defRPr>
+            </a:pPr>
+            <a:r>
+              <a:t>Input Validation:</a:t>
+            </a:r>
+          </a:p>
+          <a:p>
+            <a:pPr>
+              <a:spcAft>
+                <a:spcPts val="600"/>
+              </a:spcAft>
+              <a:defRPr b="1" sz="2000">
+                <a:solidFill>
+                  <a:srgbClr val="333333"/>
+                </a:solidFill>
+              </a:defRPr>
+            </a:pPr>
+            <a:r>
+              <a:t>while True:</a:t>
+            </a:r>
+          </a:p>
+          <a:p>
+            <a:pPr>
+              <a:spcAft>
+                <a:spcPts val="600"/>
+              </a:spcAft>
+              <a:defRPr sz="1600">
+                <a:solidFill>
+                  <a:srgbClr val="333333"/>
+                </a:solidFill>
+              </a:defRPr>
+            </a:pPr>
+            <a:r>
+              <a:t>    name = input("Name: ")</a:t>
+            </a:r>
+          </a:p>
+          <a:p>
+            <a:pPr>
+              <a:spcAft>
+                <a:spcPts val="600"/>
+              </a:spcAft>
+              <a:defRPr sz="1600">
+                <a:solidFill>
+                  <a:srgbClr val="333333"/>
+                </a:solidFill>
+              </a:defRPr>
+            </a:pPr>
+            <a:r>
+              <a:t>    if not name:</a:t>
+            </a:r>
+          </a:p>
+          <a:p>
+            <a:pPr>
+              <a:spcAft>
+                <a:spcPts val="600"/>
+              </a:spcAft>
+              <a:defRPr sz="1600">
+                <a:solidFill>
+                  <a:srgbClr val="333333"/>
+                </a:solidFill>
+              </a:defRPr>
+            </a:pPr>
+            <a:r>
+              <a:t>        continue</a:t>
+            </a:r>
+          </a:p>
+          <a:p>
+            <a:pPr>
+              <a:spcAft>
+                <a:spcPts val="600"/>
+              </a:spcAft>
+              <a:defRPr sz="1600">
+                <a:solidFill>
+                  <a:srgbClr val="333333"/>
+                </a:solidFill>
+              </a:defRPr>
+            </a:pPr>
+            <a:r>
+              <a:t>    print(f"Hello, {name}")</a:t>
+            </a:r>
+          </a:p>
+          <a:p>
+            <a:pPr>
+              <a:spcAft>
+                <a:spcPts val="600"/>
+              </a:spcAft>
+              <a:defRPr sz="1600">
+                <a:solidFill>
+                  <a:srgbClr val="333333"/>
+                </a:solidFill>
+              </a:defRPr>
+            </a:pPr>
+            <a:r>
+              <a:t>    break</a:t>
+            </a:r>
+          </a:p>
+          <a:p>
+            <a:pPr>
+              <a:spcAft>
+                <a:spcPts val="600"/>
+              </a:spcAft>
+              <a:defRPr b="1" sz="2000">
+                <a:solidFill>
+                  <a:srgbClr val="333333"/>
+                </a:solidFill>
+              </a:defRPr>
+            </a:pPr>
+            <a:r>
+              <a:t>Difference from break:</a:t>
+            </a:r>
+          </a:p>
+          <a:p>
+            <a:pPr lvl="1">
+              <a:spcAft>
+                <a:spcPts val="400"/>
+              </a:spcAft>
+              <a:defRPr sz="1600">
+                <a:solidFill>
+                  <a:srgbClr val="333333"/>
+                </a:solidFill>
+              </a:defRPr>
+            </a:pPr>
+            <a:r>
+              <a:t>• break: exits loop completely</a:t>
+            </a:r>
+          </a:p>
+          <a:p>
+            <a:pPr lvl="1">
+              <a:spcAft>
+                <a:spcPts val="400"/>
+              </a:spcAft>
+              <a:defRPr sz="1600">
+                <a:solidFill>
+                  <a:srgbClr val="333333"/>
+                </a:solidFill>
+              </a:defRPr>
+            </a:pPr>
+            <a:r>
+              <a:t>• continue: skips to next iteration</a:t>
             </a:r>
           </a:p>
         </p:txBody>
@@ -6384,7 +8873,7 @@
 </p:sld>
 </file>
 
-<file path=ppt/slides/slide8.xml><?xml version="1.0" encoding="utf-8"?>
+<file path=ppt/slides/slide9.xml><?xml version="1.0" encoding="utf-8"?>
 <p:sld xmlns:a="http://schemas.openxmlformats.org/drawingml/2006/main" xmlns:p="http://schemas.openxmlformats.org/presentationml/2006/main" xmlns:r="http://schemas.openxmlformats.org/officeDocument/2006/relationships">
   <p:cSld>
     <p:spTree>
@@ -6488,8 +8977,8 @@
         </p:nvSpPr>
         <p:spPr>
           <a:xfrm>
-            <a:off x="457200" y="365760"/>
-            <a:ext cx="10972800" cy="731520"/>
+            <a:off x="457200" y="320040"/>
+            <a:ext cx="10972800" cy="640080"/>
           </a:xfrm>
           <a:prstGeom prst="rect">
             <a:avLst/>
@@ -6503,71 +8992,28 @@
           <a:lstStyle/>
           <a:p>
             <a:pPr>
-              <a:defRPr sz="4000" b="1">
+              <a:defRPr sz="3600" b="1">
                 <a:solidFill>
                   <a:srgbClr val="003366"/>
                 </a:solidFill>
               </a:defRPr>
             </a:pPr>
             <a:r>
-              <a:t>range() Patterns 🎨</a:t>
-            </a:r>
-          </a:p>
-        </p:txBody>
-      </p:sp>
-      <p:sp>
-        <p:nvSpPr>
-          <p:cNvPr id="5" name="Rectangle 4"/>
-          <p:cNvSpPr/>
+              <a:t>Nested Loops</a:t>
+            </a:r>
+          </a:p>
+        </p:txBody>
+      </p:sp>
+      <p:sp>
+        <p:nvSpPr>
+          <p:cNvPr id="5" name="TextBox 4"/>
+          <p:cNvSpPr txBox="1"/>
           <p:nvPr/>
         </p:nvSpPr>
         <p:spPr>
           <a:xfrm>
-            <a:off x="457200" y="1005840"/>
-            <a:ext cx="1828800" cy="45720"/>
-          </a:xfrm>
-          <a:prstGeom prst="rect">
-            <a:avLst/>
-          </a:prstGeom>
-          <a:solidFill>
-            <a:srgbClr val="0066CC"/>
-          </a:solidFill>
-          <a:ln>
-            <a:noFill/>
-          </a:ln>
-        </p:spPr>
-        <p:style>
-          <a:lnRef idx="1">
-            <a:schemeClr val="accent1"/>
-          </a:lnRef>
-          <a:fillRef idx="3">
-            <a:schemeClr val="accent1"/>
-          </a:fillRef>
-          <a:effectRef idx="2">
-            <a:schemeClr val="accent1"/>
-          </a:effectRef>
-          <a:fontRef idx="minor">
-            <a:schemeClr val="lt1"/>
-          </a:fontRef>
-        </p:style>
-        <p:txBody>
-          <a:bodyPr rtlCol="0" anchor="ctr"/>
-          <a:lstStyle/>
-          <a:p>
-            <a:pPr algn="ctr"/>
-          </a:p>
-        </p:txBody>
-      </p:sp>
-      <p:sp>
-        <p:nvSpPr>
-          <p:cNvPr id="6" name="TextBox 5"/>
-          <p:cNvSpPr txBox="1"/>
-          <p:nvPr/>
-        </p:nvSpPr>
-        <p:spPr>
-          <a:xfrm>
-            <a:off x="640080" y="1371600"/>
-            <a:ext cx="10789920" cy="4572000"/>
+            <a:off x="640080" y="1188720"/>
+            <a:ext cx="10789920" cy="5303520"/>
           </a:xfrm>
           <a:prstGeom prst="rect">
             <a:avLst/>
@@ -6582,326 +9028,376 @@
           <a:p>
             <a:pPr>
               <a:spcAft>
-                <a:spcPts val="800"/>
-              </a:spcAft>
-              <a:defRPr sz="2000" b="1">
-                <a:solidFill>
-                  <a:srgbClr val="333333"/>
-                </a:solidFill>
-              </a:defRPr>
-            </a:pPr>
-            <a:r>
-              <a:t>Count by 10s</a:t>
-            </a:r>
-          </a:p>
-          <a:p>
-            <a:pPr>
-              <a:spcAft>
-                <a:spcPts val="800"/>
-              </a:spcAft>
-              <a:defRPr sz="2000" b="1">
-                <a:solidFill>
-                  <a:srgbClr val="333333"/>
-                </a:solidFill>
-              </a:defRPr>
-            </a:pPr>
-            <a:r>
-              <a:t>Countdown</a:t>
-            </a:r>
-          </a:p>
-          <a:p>
-            <a:pPr>
-              <a:spcAft>
-                <a:spcPts val="800"/>
-              </a:spcAft>
-              <a:defRPr sz="2000" b="1">
-                <a:solidFill>
-                  <a:srgbClr val="333333"/>
-                </a:solidFill>
-              </a:defRPr>
-            </a:pPr>
-            <a:r>
-              <a:t>Odd Numbers</a:t>
-            </a:r>
-          </a:p>
-          <a:p>
-            <a:pPr>
-              <a:spcAft>
-                <a:spcPts val="800"/>
-              </a:spcAft>
-              <a:defRPr sz="2000" b="1">
-                <a:solidFill>
-                  <a:srgbClr val="333333"/>
-                </a:solidFill>
-              </a:defRPr>
-            </a:pPr>
-            <a:r>
-              <a:t>Repeat N Times</a:t>
-            </a:r>
-          </a:p>
-          <a:p>
-            <a:pPr>
-              <a:spcAft>
-                <a:spcPts val="800"/>
-              </a:spcAft>
-              <a:defRPr sz="2000" b="1">
-                <a:solidFill>
-                  <a:srgbClr val="333333"/>
-                </a:solidFill>
-              </a:defRPr>
-            </a:pPr>
-            <a:r>
-              <a:t>Remember:range(stop) starts at 0 and stops BEFORE stop</a:t>
-            </a:r>
-          </a:p>
-        </p:txBody>
-      </p:sp>
-    </p:spTree>
-  </p:cSld>
-  <p:clrMapOvr>
-    <a:masterClrMapping/>
-  </p:clrMapOvr>
-</p:sld>
-</file>
-
-<file path=ppt/slides/slide9.xml><?xml version="1.0" encoding="utf-8"?>
-<p:sld xmlns:a="http://schemas.openxmlformats.org/drawingml/2006/main" xmlns:p="http://schemas.openxmlformats.org/presentationml/2006/main" xmlns:r="http://schemas.openxmlformats.org/officeDocument/2006/relationships">
-  <p:cSld>
-    <p:spTree>
-      <p:nvGrpSpPr>
-        <p:cNvPr id="1" name=""/>
-        <p:cNvGrpSpPr/>
-        <p:nvPr/>
-      </p:nvGrpSpPr>
-      <p:grpSpPr/>
-      <p:sp>
-        <p:nvSpPr>
-          <p:cNvPr id="2" name="Rectangle 1"/>
-          <p:cNvSpPr/>
-          <p:nvPr/>
-        </p:nvSpPr>
-        <p:spPr>
-          <a:xfrm>
-            <a:off x="0" y="0"/>
-            <a:ext cx="12191695" cy="6858000"/>
-          </a:xfrm>
-          <a:prstGeom prst="rect">
-            <a:avLst/>
-          </a:prstGeom>
-          <a:solidFill>
-            <a:srgbClr val="FFFFFF"/>
-          </a:solidFill>
-          <a:ln>
-            <a:noFill/>
-          </a:ln>
-        </p:spPr>
-        <p:style>
-          <a:lnRef idx="1">
-            <a:schemeClr val="accent1"/>
-          </a:lnRef>
-          <a:fillRef idx="3">
-            <a:schemeClr val="accent1"/>
-          </a:fillRef>
-          <a:effectRef idx="2">
-            <a:schemeClr val="accent1"/>
-          </a:effectRef>
-          <a:fontRef idx="minor">
-            <a:schemeClr val="lt1"/>
-          </a:fontRef>
-        </p:style>
-        <p:txBody>
-          <a:bodyPr rtlCol="0" anchor="ctr"/>
-          <a:lstStyle/>
-          <a:p>
-            <a:pPr algn="ctr"/>
-          </a:p>
-        </p:txBody>
-      </p:sp>
-      <p:sp>
-        <p:nvSpPr>
-          <p:cNvPr id="3" name="Rectangle 2"/>
-          <p:cNvSpPr/>
-          <p:nvPr/>
-        </p:nvSpPr>
-        <p:spPr>
-          <a:xfrm>
-            <a:off x="0" y="0"/>
-            <a:ext cx="12191695" cy="137160"/>
-          </a:xfrm>
-          <a:prstGeom prst="rect">
-            <a:avLst/>
-          </a:prstGeom>
-          <a:solidFill>
-            <a:srgbClr val="0066CC"/>
-          </a:solidFill>
-          <a:ln>
-            <a:noFill/>
-          </a:ln>
-        </p:spPr>
-        <p:style>
-          <a:lnRef idx="1">
-            <a:schemeClr val="accent1"/>
-          </a:lnRef>
-          <a:fillRef idx="3">
-            <a:schemeClr val="accent1"/>
-          </a:fillRef>
-          <a:effectRef idx="2">
-            <a:schemeClr val="accent1"/>
-          </a:effectRef>
-          <a:fontRef idx="minor">
-            <a:schemeClr val="lt1"/>
-          </a:fontRef>
-        </p:style>
-        <p:txBody>
-          <a:bodyPr rtlCol="0" anchor="ctr"/>
-          <a:lstStyle/>
-          <a:p>
-            <a:pPr algn="ctr"/>
-          </a:p>
-        </p:txBody>
-      </p:sp>
-      <p:sp>
-        <p:nvSpPr>
-          <p:cNvPr id="4" name="TextBox 3"/>
-          <p:cNvSpPr txBox="1"/>
-          <p:nvPr/>
-        </p:nvSpPr>
-        <p:spPr>
-          <a:xfrm>
-            <a:off x="457200" y="365760"/>
-            <a:ext cx="10972800" cy="731520"/>
-          </a:xfrm>
-          <a:prstGeom prst="rect">
-            <a:avLst/>
-          </a:prstGeom>
-          <a:noFill/>
-        </p:spPr>
-        <p:txBody>
-          <a:bodyPr wrap="none">
-            <a:spAutoFit/>
-          </a:bodyPr>
-          <a:lstStyle/>
-          <a:p>
-            <a:pPr>
-              <a:defRPr sz="4000" b="1">
-                <a:solidFill>
-                  <a:srgbClr val="003366"/>
-                </a:solidFill>
-              </a:defRPr>
-            </a:pPr>
-            <a:r>
-              <a:t>Break Statement: Exit Early</a:t>
-            </a:r>
-          </a:p>
-        </p:txBody>
-      </p:sp>
-      <p:sp>
-        <p:nvSpPr>
-          <p:cNvPr id="5" name="Rectangle 4"/>
-          <p:cNvSpPr/>
-          <p:nvPr/>
-        </p:nvSpPr>
-        <p:spPr>
-          <a:xfrm>
-            <a:off x="457200" y="1005840"/>
-            <a:ext cx="1828800" cy="45720"/>
-          </a:xfrm>
-          <a:prstGeom prst="rect">
-            <a:avLst/>
-          </a:prstGeom>
-          <a:solidFill>
-            <a:srgbClr val="0066CC"/>
-          </a:solidFill>
-          <a:ln>
-            <a:noFill/>
-          </a:ln>
-        </p:spPr>
-        <p:style>
-          <a:lnRef idx="1">
-            <a:schemeClr val="accent1"/>
-          </a:lnRef>
-          <a:fillRef idx="3">
-            <a:schemeClr val="accent1"/>
-          </a:fillRef>
-          <a:effectRef idx="2">
-            <a:schemeClr val="accent1"/>
-          </a:effectRef>
-          <a:fontRef idx="minor">
-            <a:schemeClr val="lt1"/>
-          </a:fontRef>
-        </p:style>
-        <p:txBody>
-          <a:bodyPr rtlCol="0" anchor="ctr"/>
-          <a:lstStyle/>
-          <a:p>
-            <a:pPr algn="ctr"/>
-          </a:p>
-        </p:txBody>
-      </p:sp>
-      <p:sp>
-        <p:nvSpPr>
-          <p:cNvPr id="6" name="TextBox 5"/>
-          <p:cNvSpPr txBox="1"/>
-          <p:nvPr/>
-        </p:nvSpPr>
-        <p:spPr>
-          <a:xfrm>
-            <a:off x="640080" y="1371600"/>
-            <a:ext cx="10789920" cy="4572000"/>
-          </a:xfrm>
-          <a:prstGeom prst="rect">
-            <a:avLst/>
-          </a:prstGeom>
-          <a:noFill/>
-        </p:spPr>
-        <p:txBody>
-          <a:bodyPr wrap="square">
-            <a:spAutoFit/>
-          </a:bodyPr>
-          <a:lstStyle/>
-          <a:p>
-            <a:pPr>
-              <a:spcAft>
-                <a:spcPts val="800"/>
-              </a:spcAft>
-              <a:defRPr sz="2000" b="1">
-                <a:solidFill>
-                  <a:srgbClr val="333333"/>
-                </a:solidFill>
-              </a:defRPr>
-            </a:pPr>
-            <a:r>
-              <a:t>The break statement immediately exits the loop</a:t>
-            </a:r>
-          </a:p>
-          <a:p>
-            <a:pPr>
-              <a:spcAft>
-                <a:spcPts val="800"/>
-              </a:spcAft>
-              <a:defRPr sz="2000" b="1">
-                <a:solidFill>
-                  <a:srgbClr val="333333"/>
-                </a:solidFill>
-              </a:defRPr>
-            </a:pPr>
-            <a:r>
-              <a:t>Example: Find First Even Number</a:t>
-            </a:r>
-          </a:p>
-          <a:p>
-            <a:pPr>
-              <a:spcAft>
-                <a:spcPts val="800"/>
-              </a:spcAft>
-              <a:defRPr sz="2000" b="1">
-                <a:solidFill>
-                  <a:srgbClr val="333333"/>
-                </a:solidFill>
-              </a:defRPr>
-            </a:pPr>
-            <a:r>
-              <a:t>Example: Guessing Game</a:t>
+                <a:spcPts val="600"/>
+              </a:spcAft>
+              <a:defRPr b="1" sz="2000">
+                <a:solidFill>
+                  <a:srgbClr val="333333"/>
+                </a:solidFill>
+              </a:defRPr>
+            </a:pPr>
+            <a:r>
+              <a:t>Loop Inside a Loop:</a:t>
+            </a:r>
+          </a:p>
+          <a:p>
+            <a:pPr>
+              <a:spcAft>
+                <a:spcPts val="600"/>
+              </a:spcAft>
+              <a:defRPr b="1" sz="2000">
+                <a:solidFill>
+                  <a:srgbClr val="333333"/>
+                </a:solidFill>
+              </a:defRPr>
+            </a:pPr>
+            <a:r>
+              <a:t>Basic Structure:</a:t>
+            </a:r>
+          </a:p>
+          <a:p>
+            <a:pPr>
+              <a:spcAft>
+                <a:spcPts val="600"/>
+              </a:spcAft>
+              <a:defRPr b="1" sz="2000">
+                <a:solidFill>
+                  <a:srgbClr val="333333"/>
+                </a:solidFill>
+              </a:defRPr>
+            </a:pPr>
+            <a:r>
+              <a:t>for i in range(3):</a:t>
+            </a:r>
+          </a:p>
+          <a:p>
+            <a:pPr>
+              <a:spcAft>
+                <a:spcPts val="600"/>
+              </a:spcAft>
+              <a:defRPr sz="1600">
+                <a:solidFill>
+                  <a:srgbClr val="333333"/>
+                </a:solidFill>
+              </a:defRPr>
+            </a:pPr>
+            <a:r>
+              <a:t>    for j in range(3):</a:t>
+            </a:r>
+          </a:p>
+          <a:p>
+            <a:pPr>
+              <a:spcAft>
+                <a:spcPts val="600"/>
+              </a:spcAft>
+              <a:defRPr sz="1600">
+                <a:solidFill>
+                  <a:srgbClr val="333333"/>
+                </a:solidFill>
+              </a:defRPr>
+            </a:pPr>
+            <a:r>
+              <a:t>        print(f"i={i}, j={j}")</a:t>
+            </a:r>
+          </a:p>
+          <a:p>
+            <a:pPr>
+              <a:spcAft>
+                <a:spcPts val="600"/>
+              </a:spcAft>
+              <a:defRPr b="1" sz="2000">
+                <a:solidFill>
+                  <a:srgbClr val="333333"/>
+                </a:solidFill>
+              </a:defRPr>
+            </a:pPr>
+            <a:r>
+              <a:t>Multiplication Table:</a:t>
+            </a:r>
+          </a:p>
+          <a:p>
+            <a:pPr>
+              <a:spcAft>
+                <a:spcPts val="600"/>
+              </a:spcAft>
+              <a:defRPr b="1" sz="2000">
+                <a:solidFill>
+                  <a:srgbClr val="333333"/>
+                </a:solidFill>
+              </a:defRPr>
+            </a:pPr>
+            <a:r>
+              <a:t>for i in range(1, 6):</a:t>
+            </a:r>
+          </a:p>
+          <a:p>
+            <a:pPr>
+              <a:spcAft>
+                <a:spcPts val="600"/>
+              </a:spcAft>
+              <a:defRPr sz="1600">
+                <a:solidFill>
+                  <a:srgbClr val="333333"/>
+                </a:solidFill>
+              </a:defRPr>
+            </a:pPr>
+            <a:r>
+              <a:t>    for j in range(1, 6):</a:t>
+            </a:r>
+          </a:p>
+          <a:p>
+            <a:pPr>
+              <a:spcAft>
+                <a:spcPts val="600"/>
+              </a:spcAft>
+              <a:defRPr sz="1600">
+                <a:solidFill>
+                  <a:srgbClr val="333333"/>
+                </a:solidFill>
+              </a:defRPr>
+            </a:pPr>
+            <a:r>
+              <a:t>        print(f"{i} x {j} = {i*j}")</a:t>
+            </a:r>
+          </a:p>
+          <a:p>
+            <a:pPr>
+              <a:spcAft>
+                <a:spcPts val="600"/>
+              </a:spcAft>
+              <a:defRPr b="1" sz="2000">
+                <a:solidFill>
+                  <a:srgbClr val="333333"/>
+                </a:solidFill>
+              </a:defRPr>
+            </a:pPr>
+            <a:r>
+              <a:t>Pattern Printing:</a:t>
+            </a:r>
+          </a:p>
+          <a:p>
+            <a:pPr>
+              <a:spcAft>
+                <a:spcPts val="600"/>
+              </a:spcAft>
+              <a:defRPr b="1" sz="2000">
+                <a:solidFill>
+                  <a:srgbClr val="333333"/>
+                </a:solidFill>
+              </a:defRPr>
+            </a:pPr>
+            <a:r>
+              <a:t>for row in range(5):</a:t>
+            </a:r>
+          </a:p>
+          <a:p>
+            <a:pPr>
+              <a:spcAft>
+                <a:spcPts val="600"/>
+              </a:spcAft>
+              <a:defRPr sz="1600">
+                <a:solidFill>
+                  <a:srgbClr val="333333"/>
+                </a:solidFill>
+              </a:defRPr>
+            </a:pPr>
+            <a:r>
+              <a:t>    for col in range(row + 1):</a:t>
+            </a:r>
+          </a:p>
+          <a:p>
+            <a:pPr>
+              <a:spcAft>
+                <a:spcPts val="600"/>
+              </a:spcAft>
+              <a:defRPr sz="1600">
+                <a:solidFill>
+                  <a:srgbClr val="333333"/>
+                </a:solidFill>
+              </a:defRPr>
+            </a:pPr>
+            <a:r>
+              <a:t>        print("*", end="")</a:t>
+            </a:r>
+          </a:p>
+          <a:p>
+            <a:pPr>
+              <a:spcAft>
+                <a:spcPts val="600"/>
+              </a:spcAft>
+              <a:defRPr sz="1600">
+                <a:solidFill>
+                  <a:srgbClr val="333333"/>
+                </a:solidFill>
+              </a:defRPr>
+            </a:pPr>
+            <a:r>
+              <a:t>    print()  # New line</a:t>
+            </a:r>
+          </a:p>
+          <a:p>
+            <a:pPr>
+              <a:spcAft>
+                <a:spcPts val="600"/>
+              </a:spcAft>
+              <a:defRPr b="1" sz="2000">
+                <a:solidFill>
+                  <a:srgbClr val="333333"/>
+                </a:solidFill>
+              </a:defRPr>
+            </a:pPr>
+            <a:r>
+              <a:t>Output:</a:t>
+            </a:r>
+          </a:p>
+          <a:p>
+            <a:pPr>
+              <a:spcAft>
+                <a:spcPts val="600"/>
+              </a:spcAft>
+              <a:defRPr sz="1600">
+                <a:solidFill>
+                  <a:srgbClr val="333333"/>
+                </a:solidFill>
+              </a:defRPr>
+            </a:pPr>
+            <a:r>
+              <a:t>*</a:t>
+            </a:r>
+          </a:p>
+          <a:p>
+            <a:pPr>
+              <a:spcAft>
+                <a:spcPts val="600"/>
+              </a:spcAft>
+              <a:defRPr sz="1600">
+                <a:solidFill>
+                  <a:srgbClr val="333333"/>
+                </a:solidFill>
+              </a:defRPr>
+            </a:pPr>
+            <a:r>
+              <a:t>**</a:t>
+            </a:r>
+          </a:p>
+          <a:p>
+            <a:pPr>
+              <a:spcAft>
+                <a:spcPts val="600"/>
+              </a:spcAft>
+              <a:defRPr sz="1600">
+                <a:solidFill>
+                  <a:srgbClr val="333333"/>
+                </a:solidFill>
+              </a:defRPr>
+            </a:pPr>
+            <a:r>
+              <a:t>***</a:t>
+            </a:r>
+          </a:p>
+          <a:p>
+            <a:pPr>
+              <a:spcAft>
+                <a:spcPts val="600"/>
+              </a:spcAft>
+              <a:defRPr sz="1600">
+                <a:solidFill>
+                  <a:srgbClr val="333333"/>
+                </a:solidFill>
+              </a:defRPr>
+            </a:pPr>
+            <a:r>
+              <a:t>****</a:t>
+            </a:r>
+          </a:p>
+          <a:p>
+            <a:pPr>
+              <a:spcAft>
+                <a:spcPts val="600"/>
+              </a:spcAft>
+              <a:defRPr sz="1600">
+                <a:solidFill>
+                  <a:srgbClr val="333333"/>
+                </a:solidFill>
+              </a:defRPr>
+            </a:pPr>
+            <a:r>
+              <a:t>*****</a:t>
+            </a:r>
+          </a:p>
+          <a:p>
+            <a:pPr>
+              <a:spcAft>
+                <a:spcPts val="600"/>
+              </a:spcAft>
+              <a:defRPr b="1" sz="2000">
+                <a:solidFill>
+                  <a:srgbClr val="333333"/>
+                </a:solidFill>
+              </a:defRPr>
+            </a:pPr>
+            <a:r>
+              <a:t>How It Works:</a:t>
+            </a:r>
+          </a:p>
+          <a:p>
+            <a:pPr lvl="1">
+              <a:spcAft>
+                <a:spcPts val="400"/>
+              </a:spcAft>
+              <a:defRPr sz="1600">
+                <a:solidFill>
+                  <a:srgbClr val="333333"/>
+                </a:solidFill>
+              </a:defRPr>
+            </a:pPr>
+            <a:r>
+              <a:t>• Outer loop runs once</a:t>
+            </a:r>
+          </a:p>
+          <a:p>
+            <a:pPr lvl="1">
+              <a:spcAft>
+                <a:spcPts val="400"/>
+              </a:spcAft>
+              <a:defRPr sz="1600">
+                <a:solidFill>
+                  <a:srgbClr val="333333"/>
+                </a:solidFill>
+              </a:defRPr>
+            </a:pPr>
+            <a:r>
+              <a:t>• Inner loop completes all iterations</a:t>
+            </a:r>
+          </a:p>
+          <a:p>
+            <a:pPr lvl="1">
+              <a:spcAft>
+                <a:spcPts val="400"/>
+              </a:spcAft>
+              <a:defRPr sz="1600">
+                <a:solidFill>
+                  <a:srgbClr val="333333"/>
+                </a:solidFill>
+              </a:defRPr>
+            </a:pPr>
+            <a:r>
+              <a:t>• Outer loop continues to next iteration</a:t>
+            </a:r>
+          </a:p>
+          <a:p>
+            <a:pPr lvl="1">
+              <a:spcAft>
+                <a:spcPts val="400"/>
+              </a:spcAft>
+              <a:defRPr sz="1600">
+                <a:solidFill>
+                  <a:srgbClr val="333333"/>
+                </a:solidFill>
+              </a:defRPr>
+            </a:pPr>
+            <a:r>
+              <a:t>• Repeat</a:t>
             </a:r>
           </a:p>
         </p:txBody>
